--- a/第八週(10-29)/第八週_第2節_簡報.pptx
+++ b/第八週(10-29)/第八週_第2節_簡報.pptx
@@ -2010,11 +2010,11 @@
                 <a:spcPts val="0"/>
               </a:spcBef>
               <a:spcAft>
-                <a:spcPts val="233"/>
+                <a:spcPts val="208"/>
               </a:spcAft>
             </a:pPr>
             <a:r>
-              <a:rPr sz="1400" b="1" lang="zh-TW" dirty="0">
+              <a:rPr sz="1250" b="1" lang="zh-TW" dirty="0">
                 <a:solidFill>
                   <a:srgbClr val="000000"/>
                 </a:solidFill>
@@ -2025,7 +2025,7 @@
               <a:t>這一張的目的：</a:t>
             </a:r>
             <a:r>
-              <a:rPr sz="1400" lang="zh-TW" dirty="0">
+              <a:rPr sz="1250" lang="zh-TW" dirty="0">
                 <a:solidFill>
                   <a:srgbClr val="000000"/>
                 </a:solidFill>
@@ -2043,11 +2043,11 @@
                 <a:spcPts val="0"/>
               </a:spcBef>
               <a:spcAft>
-                <a:spcPts val="233"/>
+                <a:spcPts val="208"/>
               </a:spcAft>
             </a:pPr>
             <a:r>
-              <a:rPr sz="1400" lang="zh-TW" dirty="0">
+              <a:rPr sz="1250" lang="zh-TW" dirty="0">
                 <a:solidFill>
                   <a:srgbClr val="000000"/>
                 </a:solidFill>
@@ -2065,11 +2065,11 @@
                 <a:spcPts val="0"/>
               </a:spcBef>
               <a:spcAft>
-                <a:spcPts val="233"/>
+                <a:spcPts val="208"/>
               </a:spcAft>
             </a:pPr>
             <a:r>
-              <a:rPr sz="1400" b="1" lang="zh-TW" dirty="0">
+              <a:rPr sz="1250" b="1" lang="zh-TW" dirty="0">
                 <a:solidFill>
                   <a:srgbClr val="000000"/>
                 </a:solidFill>
@@ -2080,7 +2080,7 @@
               <a:t>第一條：有一個光達或雷達點就要標。</a:t>
             </a:r>
             <a:r>
-              <a:rPr sz="1400" lang="zh-TW" dirty="0">
+              <a:rPr sz="1250" lang="zh-TW" dirty="0">
                 <a:solidFill>
                   <a:srgbClr val="000000"/>
                 </a:solidFill>
@@ -2098,11 +2098,11 @@
                 <a:spcPts val="0"/>
               </a:spcBef>
               <a:spcAft>
-                <a:spcPts val="233"/>
+                <a:spcPts val="208"/>
               </a:spcAft>
             </a:pPr>
             <a:r>
-              <a:rPr sz="1400" b="1" lang="zh-TW" dirty="0">
+              <a:rPr sz="1250" b="1" lang="zh-TW" dirty="0">
                 <a:solidFill>
                   <a:srgbClr val="000000"/>
                 </a:solidFill>
@@ -2113,7 +2113,7 @@
               <a:t>第二條：框要很貼。</a:t>
             </a:r>
             <a:r>
-              <a:rPr sz="1400" lang="zh-TW" dirty="0">
+              <a:rPr sz="1250" lang="zh-TW" dirty="0">
                 <a:solidFill>
                   <a:srgbClr val="000000"/>
                 </a:solidFill>
@@ -2131,11 +2131,11 @@
                 <a:spcPts val="0"/>
               </a:spcBef>
               <a:spcAft>
-                <a:spcPts val="233"/>
+                <a:spcPts val="208"/>
               </a:spcAft>
             </a:pPr>
             <a:r>
-              <a:rPr sz="1400" b="1" lang="zh-TW" dirty="0">
+              <a:rPr sz="1250" b="1" lang="zh-TW" dirty="0">
                 <a:solidFill>
                   <a:srgbClr val="000000"/>
                 </a:solidFill>
@@ -2146,7 +2146,7 @@
               <a:t>第三條：手腳要包進去。</a:t>
             </a:r>
             <a:r>
-              <a:rPr sz="1400" lang="zh-TW" dirty="0">
+              <a:rPr sz="1250" lang="zh-TW" dirty="0">
                 <a:solidFill>
                   <a:srgbClr val="000000"/>
                 </a:solidFill>
@@ -2164,11 +2164,11 @@
                 <a:spcPts val="0"/>
               </a:spcBef>
               <a:spcAft>
-                <a:spcPts val="233"/>
+                <a:spcPts val="208"/>
               </a:spcAft>
             </a:pPr>
             <a:r>
-              <a:rPr sz="1400" b="1" lang="zh-TW" dirty="0">
+              <a:rPr sz="1250" b="1" lang="zh-TW" dirty="0">
                 <a:solidFill>
                   <a:srgbClr val="000000"/>
                 </a:solidFill>
@@ -2179,7 +2179,7 @@
               <a:t>第四條、第五條，騎士。</a:t>
             </a:r>
             <a:r>
-              <a:rPr sz="1400" lang="zh-TW" dirty="0">
+              <a:rPr sz="1250" lang="zh-TW" dirty="0">
                 <a:solidFill>
                   <a:srgbClr val="000000"/>
                 </a:solidFill>
@@ -2190,7 +2190,7 @@
               <a:t>機車、腳踏車有人騎，</a:t>
             </a:r>
             <a:r>
-              <a:rPr sz="1400" b="1" lang="zh-TW" dirty="0">
+              <a:rPr sz="1250" b="1" lang="zh-TW" dirty="0">
                 <a:solidFill>
                   <a:srgbClr val="000000"/>
                 </a:solidFill>
@@ -2201,7 +2201,7 @@
               <a:t>騎士跟車框在同一個框裡</a:t>
             </a:r>
             <a:r>
-              <a:rPr sz="1400" lang="zh-TW" dirty="0">
+              <a:rPr sz="1250" lang="zh-TW" dirty="0">
                 <a:solidFill>
                   <a:srgbClr val="000000"/>
                 </a:solidFill>
@@ -2212,7 +2212,7 @@
               <a:t>；可是旁邊站著、沒有騎的人，</a:t>
             </a:r>
             <a:r>
-              <a:rPr sz="1400" b="1" lang="zh-TW" dirty="0">
+              <a:rPr sz="1250" b="1" lang="zh-TW" dirty="0">
                 <a:solidFill>
                   <a:srgbClr val="000000"/>
                 </a:solidFill>
@@ -2223,7 +2223,7 @@
               <a:t>不要包進去</a:t>
             </a:r>
             <a:r>
-              <a:rPr sz="1400" lang="zh-TW" dirty="0">
+              <a:rPr sz="1250" lang="zh-TW" dirty="0">
                 <a:solidFill>
                   <a:srgbClr val="000000"/>
                 </a:solidFill>
@@ -2241,11 +2241,11 @@
                 <a:spcPts val="0"/>
               </a:spcBef>
               <a:spcAft>
-                <a:spcPts val="233"/>
+                <a:spcPts val="208"/>
               </a:spcAft>
             </a:pPr>
             <a:r>
-              <a:rPr sz="1400" b="1" lang="zh-TW" dirty="0">
+              <a:rPr sz="1250" b="1" lang="zh-TW" dirty="0">
                 <a:solidFill>
                   <a:srgbClr val="000000"/>
                 </a:solidFill>
@@ -2256,7 +2256,7 @@
               <a:t>第六條：可見度分四級。</a:t>
             </a:r>
             <a:r>
-              <a:rPr sz="1400" lang="zh-TW" dirty="0">
+              <a:rPr sz="1250" lang="zh-TW" dirty="0">
                 <a:solidFill>
                   <a:srgbClr val="000000"/>
                 </a:solidFill>
@@ -2274,19 +2274,52 @@
                 <a:spcPts val="0"/>
               </a:spcBef>
               <a:spcAft>
-                <a:spcPts val="233"/>
+                <a:spcPts val="208"/>
               </a:spcAft>
             </a:pPr>
             <a:r>
-              <a:rPr sz="1400" lang="zh-TW" dirty="0">
-                <a:solidFill>
-                  <a:srgbClr val="000000"/>
-                </a:solidFill>
-                <a:latin typeface="Arial Unicode MS"/>
-                <a:ea typeface="Arial Unicode MS"/>
-                <a:cs typeface="Arial Unicode MS"/>
-              </a:rPr>
-              <a:t>注意，nuScenes 標的是立體框，今天我們在照片上標平面框，比較簡單，但規則的精神一樣。網頁右邊也寫了一份今天的規則。</a:t>
+              <a:rPr sz="1250" lang="zh-TW" dirty="0">
+                <a:solidFill>
+                  <a:srgbClr val="000000"/>
+                </a:solidFill>
+                <a:latin typeface="Arial Unicode MS"/>
+                <a:ea typeface="Arial Unicode MS"/>
+                <a:cs typeface="Arial Unicode MS"/>
+              </a:rPr>
+              <a:t>注意，nuScenes 標的是立體框，今天我們在照片上標平面框，比較簡單，但規則的精神一樣。網頁右邊也寫了一份今天的規則。
+</a:t>
+            </a:r>
+          </a:p>
+          <a:p>
+            <a:pPr algn="l">
+              <a:spcBef>
+                <a:spcPts val="0"/>
+              </a:spcBef>
+              <a:spcAft>
+                <a:spcPts val="208"/>
+              </a:spcAft>
+            </a:pPr>
+            <a:r>
+              <a:rPr sz="1250" b="1" lang="zh-TW" dirty="0">
+                <a:solidFill>
+                  <a:srgbClr val="000000"/>
+                </a:solidFill>
+                <a:latin typeface="Arial Unicode MS"/>
+                <a:ea typeface="Arial Unicode MS"/>
+                <a:cs typeface="Arial Unicode MS"/>
+              </a:rPr>
+              <a:t>影片（CVAT 官方教學，英文，可開自動翻譯字幕）：從 0:16 播到 2:47。</a:t>
+            </a:r>
+            <a:r>
+              <a:rPr sz="1250" lang="zh-TW" dirty="0">
+                <a:solidFill>
+                  <a:srgbClr val="000000"/>
+                </a:solidFill>
+                <a:latin typeface="Arial Unicode MS"/>
+                <a:ea typeface="Arial Unicode MS"/>
+                <a:cs typeface="Arial Unicode MS"/>
+              </a:rPr>
+              <a:t>CVAT 是一套免費、開放原始碼的標註軟體，很多公司真的用它標資料。畫面是一條下雨的街道，有行人和車。他示範兩種畫框的方法：點兩個角（0:43），或點上下左右四個點，形狀奇怪的東西比較準（1:20）；畫好可以拖曳、拉邊調大小（1:48）；2:35 有一個「occluded（被擋住）」的勾選，就是我們表上的可見度。等一下各位用的練習台是簡化版，原理一樣。</a:t>
             </a:r>
           </a:p>
         </p:txBody>
@@ -7277,7 +7310,7 @@
       </p:nvGrpSpPr>
       <p:grpSpPr>
         <a:xfrm>
-          <a:off x="680837" y="0"/>
+          <a:off x="0" y="0"/>
           <a:ext cx="1" cy="1"/>
           <a:chOff x="0" y="0"/>
           <a:chExt cx="0" cy="0"/>
@@ -7291,8 +7324,8 @@
         </p:nvSpPr>
         <p:spPr>
           <a:xfrm>
-            <a:off x="1108865" y="249034"/>
-            <a:ext cx="6926270" cy="715974"/>
+            <a:off x="502920" y="292608"/>
+            <a:ext cx="8138160" cy="841248"/>
           </a:xfrm>
           <a:prstGeom prst="rect">
             <a:avLst/>
@@ -7311,7 +7344,7 @@
               <a:buNone/>
             </a:pPr>
             <a:r>
-              <a:rPr lang="en-US" sz="1870" b="1" dirty="0">
+              <a:rPr lang="en-US" sz="2200" b="1" dirty="0">
                 <a:solidFill>
                   <a:srgbClr val="0B1F3A"/>
                 </a:solidFill>
@@ -7321,7 +7354,7 @@
               </a:rPr>
               <a:t>Quy tắc gán nhãn chính thức của nuScenes (trích)</a:t>
             </a:r>
-            <a:endParaRPr lang="en-US" sz="1870" dirty="0"/>
+            <a:endParaRPr lang="en-US" sz="2200" dirty="0"/>
           </a:p>
           <a:p>
             <a:pPr indent="0" marL="0">
@@ -7331,7 +7364,7 @@
               <a:buNone/>
             </a:pPr>
             <a:r>
-              <a:rPr lang="en-US" sz="1150" dirty="0">
+              <a:rPr lang="en-US" sz="1350" dirty="0">
                 <a:solidFill>
                   <a:srgbClr val="5F7183"/>
                 </a:solidFill>
@@ -7341,7 +7374,7 @@
               </a:rPr>
               <a:t>nuScenes 官方標註規則（節錄）</a:t>
             </a:r>
-            <a:endParaRPr lang="en-US" sz="1870" dirty="0"/>
+            <a:endParaRPr lang="en-US" sz="2200" dirty="0"/>
           </a:p>
         </p:txBody>
       </p:sp>
@@ -7360,19 +7393,19 @@
           </p:nvPr>
         </p:nvGraphicFramePr>
         <p:xfrm>
-          <a:off x="1108865" y="965008"/>
-          <a:ext cx="6926270" cy="778233"/>
+          <a:off x="502920" y="1133856"/>
+          <a:ext cx="8138160" cy="914400"/>
         </p:xfrm>
         <a:graphic>
           <a:graphicData uri="http://schemas.openxmlformats.org/drawingml/2006/table">
             <a:tbl>
               <a:tblPr/>
               <a:tblGrid>
-                <a:gridCol w="2023405"/>
-                <a:gridCol w="2645991"/>
-                <a:gridCol w="2256874"/>
+                <a:gridCol w="2377440"/>
+                <a:gridCol w="3108960"/>
+                <a:gridCol w="2651760"/>
               </a:tblGrid>
-              <a:tr h="326858">
+              <a:tr h="274320">
                 <a:tc>
                   <a:txBody>
                     <a:bodyPr/>
@@ -7382,7 +7415,7 @@
                         <a:buNone/>
                       </a:pPr>
                       <a:r>
-                        <a:rPr lang="en-US" sz="890" b="1" dirty="0">
+                        <a:rPr lang="en-US" sz="950" b="1" dirty="0">
                           <a:solidFill>
                             <a:srgbClr val="FFFFFF"/>
                           </a:solidFill>
@@ -7392,14 +7425,14 @@
                         </a:rPr>
                         <a:t>Quy tắc</a:t>
                       </a:r>
-                      <a:endParaRPr lang="en-US" sz="1020" dirty="0"/>
+                      <a:endParaRPr lang="en-US" sz="1200" dirty="0"/>
                     </a:p>
                     <a:p>
                       <a:pPr algn="l" indent="0" marL="0">
                         <a:buNone/>
                       </a:pPr>
                       <a:r>
-                        <a:rPr lang="en-US" sz="770" dirty="0">
+                        <a:rPr lang="en-US" sz="800" dirty="0">
                           <a:solidFill>
                             <a:srgbClr val="CFE0EC"/>
                           </a:solidFill>
@@ -7409,7 +7442,7 @@
                         </a:rPr>
                         <a:t>規則</a:t>
                       </a:r>
-                      <a:endParaRPr lang="en-US" sz="1020" dirty="0"/>
+                      <a:endParaRPr lang="en-US" sz="1200" dirty="0"/>
                     </a:p>
                   </a:txBody>
                   <a:tcPr marL="63500" marR="63500" marT="38100" marB="38100" anchor="ctr">
@@ -7463,7 +7496,7 @@
                         <a:buNone/>
                       </a:pPr>
                       <a:r>
-                        <a:rPr lang="en-US" sz="890" b="1" dirty="0">
+                        <a:rPr lang="en-US" sz="950" b="1" dirty="0">
                           <a:solidFill>
                             <a:srgbClr val="FFFFFF"/>
                           </a:solidFill>
@@ -7473,14 +7506,14 @@
                         </a:rPr>
                         <a:t>Nguyên văn (tiếng Anh)</a:t>
                       </a:r>
-                      <a:endParaRPr lang="en-US" sz="1020" dirty="0"/>
+                      <a:endParaRPr lang="en-US" sz="1200" dirty="0"/>
                     </a:p>
                     <a:p>
                       <a:pPr algn="l" indent="0" marL="0">
                         <a:buNone/>
                       </a:pPr>
                       <a:r>
-                        <a:rPr lang="en-US" sz="770" dirty="0">
+                        <a:rPr lang="en-US" sz="800" dirty="0">
                           <a:solidFill>
                             <a:srgbClr val="CFE0EC"/>
                           </a:solidFill>
@@ -7490,7 +7523,7 @@
                         </a:rPr>
                         <a:t>原文</a:t>
                       </a:r>
-                      <a:endParaRPr lang="en-US" sz="1020" dirty="0"/>
+                      <a:endParaRPr lang="en-US" sz="1200" dirty="0"/>
                     </a:p>
                   </a:txBody>
                   <a:tcPr marL="63500" marR="63500" marT="38100" marB="38100" anchor="ctr">
@@ -7544,7 +7577,7 @@
                         <a:buNone/>
                       </a:pPr>
                       <a:r>
-                        <a:rPr lang="en-US" sz="890" b="1" dirty="0">
+                        <a:rPr lang="en-US" sz="950" b="1" dirty="0">
                           <a:solidFill>
                             <a:srgbClr val="FFFFFF"/>
                           </a:solidFill>
@@ -7554,14 +7587,14 @@
                         </a:rPr>
                         <a:t>Vì sao</a:t>
                       </a:r>
-                      <a:endParaRPr lang="en-US" sz="1020" dirty="0"/>
+                      <a:endParaRPr lang="en-US" sz="1200" dirty="0"/>
                     </a:p>
                     <a:p>
                       <a:pPr algn="l" indent="0" marL="0">
                         <a:buNone/>
                       </a:pPr>
                       <a:r>
-                        <a:rPr lang="en-US" sz="770" dirty="0">
+                        <a:rPr lang="en-US" sz="800" dirty="0">
                           <a:solidFill>
                             <a:srgbClr val="CFE0EC"/>
                           </a:solidFill>
@@ -7571,7 +7604,7 @@
                         </a:rPr>
                         <a:t>為什麼</a:t>
                       </a:r>
-                      <a:endParaRPr lang="en-US" sz="1020" dirty="0"/>
+                      <a:endParaRPr lang="en-US" sz="1200" dirty="0"/>
                     </a:p>
                   </a:txBody>
                   <a:tcPr marL="63500" marR="63500" marT="38100" marB="38100" anchor="ctr">
@@ -7617,7 +7650,7 @@
                   </a:tcPr>
                 </a:tc>
               </a:tr>
-              <a:tr h="326858">
+              <a:tr h="274320">
                 <a:tc>
                   <a:txBody>
                     <a:bodyPr/>
@@ -7627,7 +7660,7 @@
                         <a:buNone/>
                       </a:pPr>
                       <a:r>
-                        <a:rPr lang="en-US" sz="890" b="1" dirty="0">
+                        <a:rPr lang="en-US" sz="950" b="1" dirty="0">
                           <a:solidFill>
                             <a:srgbClr val="0B1F3A"/>
                           </a:solidFill>
@@ -7637,14 +7670,14 @@
                         </a:rPr>
                         <a:t>Có ≥ 1 điểm lidar hoặc radar là phải gán</a:t>
                       </a:r>
-                      <a:endParaRPr lang="en-US" sz="1020" dirty="0"/>
+                      <a:endParaRPr lang="en-US" sz="1200" dirty="0"/>
                     </a:p>
                     <a:p>
                       <a:pPr algn="l" indent="0" marL="0">
                         <a:buNone/>
                       </a:pPr>
                       <a:r>
-                        <a:rPr lang="en-US" sz="770" dirty="0">
+                        <a:rPr lang="en-US" sz="800" dirty="0">
                           <a:solidFill>
                             <a:srgbClr val="5F7183"/>
                           </a:solidFill>
@@ -7654,7 +7687,7 @@
                         </a:rPr>
                         <a:t>有 1 個光達或雷達點就要標</a:t>
                       </a:r>
-                      <a:endParaRPr lang="en-US" sz="1020" dirty="0"/>
+                      <a:endParaRPr lang="en-US" sz="1200" dirty="0"/>
                     </a:p>
                   </a:txBody>
                   <a:tcPr marL="63500" marR="63500" marT="38100" marB="38100" anchor="ctr">
@@ -7705,7 +7738,7 @@
                         <a:buNone/>
                       </a:pPr>
                       <a:r>
-                        <a:rPr lang="en-US" sz="890" dirty="0">
+                        <a:rPr lang="en-US" sz="950" dirty="0">
                           <a:solidFill>
                             <a:srgbClr val="1A2733"/>
                           </a:solidFill>
@@ -7715,7 +7748,7 @@
                         </a:rPr>
                         <a:t>Label any target object containing at least 1 LIDAR or RADAR point</a:t>
                       </a:r>
-                      <a:endParaRPr lang="en-US" sz="1020" dirty="0"/>
+                      <a:endParaRPr lang="en-US" sz="1200" dirty="0"/>
                     </a:p>
                   </a:txBody>
                   <a:tcPr marL="63500" marR="63500" marT="38100" marB="38100" anchor="ctr">
@@ -7766,7 +7799,7 @@
                         <a:buNone/>
                       </a:pPr>
                       <a:r>
-                        <a:rPr lang="en-US" sz="890" dirty="0">
+                        <a:rPr lang="en-US" sz="950" dirty="0">
                           <a:solidFill>
                             <a:srgbClr val="1A2733"/>
                           </a:solidFill>
@@ -7776,14 +7809,14 @@
                         </a:rPr>
                         <a:t>Cảm biến thấy được thì mô hình phải học</a:t>
                       </a:r>
-                      <a:endParaRPr lang="en-US" sz="1020" dirty="0"/>
+                      <a:endParaRPr lang="en-US" sz="1200" dirty="0"/>
                     </a:p>
                     <a:p>
                       <a:pPr algn="l" indent="0" marL="0">
                         <a:buNone/>
                       </a:pPr>
                       <a:r>
-                        <a:rPr lang="en-US" sz="770" dirty="0">
+                        <a:rPr lang="en-US" sz="800" dirty="0">
                           <a:solidFill>
                             <a:srgbClr val="5F7183"/>
                           </a:solidFill>
@@ -7793,7 +7826,7 @@
                         </a:rPr>
                         <a:t>感測器看得到，模型就該學</a:t>
                       </a:r>
-                      <a:endParaRPr lang="en-US" sz="1020" dirty="0"/>
+                      <a:endParaRPr lang="en-US" sz="1200" dirty="0"/>
                     </a:p>
                   </a:txBody>
                   <a:tcPr marL="63500" marR="63500" marT="38100" marB="38100" anchor="ctr">
@@ -7836,7 +7869,7 @@
                   </a:tcPr>
                 </a:tc>
               </a:tr>
-              <a:tr h="326858">
+              <a:tr h="274320">
                 <a:tc>
                   <a:txBody>
                     <a:bodyPr/>
@@ -7846,7 +7879,7 @@
                         <a:buNone/>
                       </a:pPr>
                       <a:r>
-                        <a:rPr lang="en-US" sz="890" b="1" dirty="0">
+                        <a:rPr lang="en-US" sz="950" b="1" dirty="0">
                           <a:solidFill>
                             <a:srgbClr val="0B1F3A"/>
                           </a:solidFill>
@@ -7856,14 +7889,14 @@
                         </a:rPr>
                         <a:t>Khung phải rất sát</a:t>
                       </a:r>
-                      <a:endParaRPr lang="en-US" sz="1020" dirty="0"/>
+                      <a:endParaRPr lang="en-US" sz="1200" dirty="0"/>
                     </a:p>
                     <a:p>
                       <a:pPr algn="l" indent="0" marL="0">
                         <a:buNone/>
                       </a:pPr>
                       <a:r>
-                        <a:rPr lang="en-US" sz="770" dirty="0">
+                        <a:rPr lang="en-US" sz="800" dirty="0">
                           <a:solidFill>
                             <a:srgbClr val="5F7183"/>
                           </a:solidFill>
@@ -7873,7 +7906,7 @@
                         </a:rPr>
                         <a:t>框要很貼</a:t>
                       </a:r>
-                      <a:endParaRPr lang="en-US" sz="1020" dirty="0"/>
+                      <a:endParaRPr lang="en-US" sz="1200" dirty="0"/>
                     </a:p>
                   </a:txBody>
                   <a:tcPr marL="63500" marR="63500" marT="38100" marB="38100" anchor="ctr">
@@ -7924,7 +7957,7 @@
                         <a:buNone/>
                       </a:pPr>
                       <a:r>
-                        <a:rPr lang="en-US" sz="890" dirty="0">
+                        <a:rPr lang="en-US" sz="950" dirty="0">
                           <a:solidFill>
                             <a:srgbClr val="1A2733"/>
                           </a:solidFill>
@@ -7934,7 +7967,7 @@
                         </a:rPr>
                         <a:t>Cuboids must be very tight.</a:t>
                       </a:r>
-                      <a:endParaRPr lang="en-US" sz="1020" dirty="0"/>
+                      <a:endParaRPr lang="en-US" sz="1200" dirty="0"/>
                     </a:p>
                   </a:txBody>
                   <a:tcPr marL="63500" marR="63500" marT="38100" marB="38100" anchor="ctr">
@@ -7985,7 +8018,7 @@
                         <a:buNone/>
                       </a:pPr>
                       <a:r>
-                        <a:rPr lang="en-US" sz="890" dirty="0">
+                        <a:rPr lang="en-US" sz="950" dirty="0">
                           <a:solidFill>
                             <a:srgbClr val="1A2733"/>
                           </a:solidFill>
@@ -7995,14 +8028,14 @@
                         </a:rPr>
                         <a:t>Khung rộng → sai vị trí, sai khoảng cách</a:t>
                       </a:r>
-                      <a:endParaRPr lang="en-US" sz="1020" dirty="0"/>
+                      <a:endParaRPr lang="en-US" sz="1200" dirty="0"/>
                     </a:p>
                     <a:p>
                       <a:pPr algn="l" indent="0" marL="0">
                         <a:buNone/>
                       </a:pPr>
                       <a:r>
-                        <a:rPr lang="en-US" sz="770" dirty="0">
+                        <a:rPr lang="en-US" sz="800" dirty="0">
                           <a:solidFill>
                             <a:srgbClr val="5F7183"/>
                           </a:solidFill>
@@ -8012,7 +8045,7 @@
                         </a:rPr>
                         <a:t>框太鬆→位置、距離都不準</a:t>
                       </a:r>
-                      <a:endParaRPr lang="en-US" sz="1020" dirty="0"/>
+                      <a:endParaRPr lang="en-US" sz="1200" dirty="0"/>
                     </a:p>
                   </a:txBody>
                   <a:tcPr marL="63500" marR="63500" marT="38100" marB="38100" anchor="ctr">
@@ -8055,7 +8088,7 @@
                   </a:tcPr>
                 </a:tc>
               </a:tr>
-              <a:tr h="326858">
+              <a:tr h="274320">
                 <a:tc>
                   <a:txBody>
                     <a:bodyPr/>
@@ -8065,7 +8098,7 @@
                         <a:buNone/>
                       </a:pPr>
                       <a:r>
-                        <a:rPr lang="en-US" sz="890" b="1" dirty="0">
+                        <a:rPr lang="en-US" sz="950" b="1" dirty="0">
                           <a:solidFill>
                             <a:srgbClr val="0B1F3A"/>
                           </a:solidFill>
@@ -8075,14 +8108,14 @@
                         </a:rPr>
                         <a:t>Tay chân phải nằm trong khung</a:t>
                       </a:r>
-                      <a:endParaRPr lang="en-US" sz="1020" dirty="0"/>
+                      <a:endParaRPr lang="en-US" sz="1200" dirty="0"/>
                     </a:p>
                     <a:p>
                       <a:pPr algn="l" indent="0" marL="0">
                         <a:buNone/>
                       </a:pPr>
                       <a:r>
-                        <a:rPr lang="en-US" sz="770" dirty="0">
+                        <a:rPr lang="en-US" sz="800" dirty="0">
                           <a:solidFill>
                             <a:srgbClr val="5F7183"/>
                           </a:solidFill>
@@ -8092,7 +8125,7 @@
                         </a:rPr>
                         <a:t>手腳要包進去</a:t>
                       </a:r>
-                      <a:endParaRPr lang="en-US" sz="1020" dirty="0"/>
+                      <a:endParaRPr lang="en-US" sz="1200" dirty="0"/>
                     </a:p>
                   </a:txBody>
                   <a:tcPr marL="63500" marR="63500" marT="38100" marB="38100" anchor="ctr">
@@ -8143,7 +8176,7 @@
                         <a:buNone/>
                       </a:pPr>
                       <a:r>
-                        <a:rPr lang="en-US" sz="890" dirty="0">
+                        <a:rPr lang="en-US" sz="950" dirty="0">
                           <a:solidFill>
                             <a:srgbClr val="1A2733"/>
                           </a:solidFill>
@@ -8153,7 +8186,7 @@
                         </a:rPr>
                         <a:t>…the bounding box should include the extremities.</a:t>
                       </a:r>
-                      <a:endParaRPr lang="en-US" sz="1020" dirty="0"/>
+                      <a:endParaRPr lang="en-US" sz="1200" dirty="0"/>
                     </a:p>
                   </a:txBody>
                   <a:tcPr marL="63500" marR="63500" marT="38100" marB="38100" anchor="ctr">
@@ -8204,7 +8237,7 @@
                         <a:buNone/>
                       </a:pPr>
                       <a:r>
-                        <a:rPr lang="en-US" sz="890" dirty="0">
+                        <a:rPr lang="en-US" sz="950" dirty="0">
                           <a:solidFill>
                             <a:srgbClr val="1A2733"/>
                           </a:solidFill>
@@ -8214,14 +8247,14 @@
                         </a:rPr>
                         <a:t>Tay giơ ra cũng có thể bị đụng</a:t>
                       </a:r>
-                      <a:endParaRPr lang="en-US" sz="1020" dirty="0"/>
+                      <a:endParaRPr lang="en-US" sz="1200" dirty="0"/>
                     </a:p>
                     <a:p>
                       <a:pPr algn="l" indent="0" marL="0">
                         <a:buNone/>
                       </a:pPr>
                       <a:r>
-                        <a:rPr lang="en-US" sz="770" dirty="0">
+                        <a:rPr lang="en-US" sz="800" dirty="0">
                           <a:solidFill>
                             <a:srgbClr val="5F7183"/>
                           </a:solidFill>
@@ -8231,7 +8264,7 @@
                         </a:rPr>
                         <a:t>伸出去的手也會被撞到</a:t>
                       </a:r>
-                      <a:endParaRPr lang="en-US" sz="1020" dirty="0"/>
+                      <a:endParaRPr lang="en-US" sz="1200" dirty="0"/>
                     </a:p>
                   </a:txBody>
                   <a:tcPr marL="63500" marR="63500" marT="38100" marB="38100" anchor="ctr">
@@ -8274,7 +8307,7 @@
                   </a:tcPr>
                 </a:tc>
               </a:tr>
-              <a:tr h="326858">
+              <a:tr h="274320">
                 <a:tc>
                   <a:txBody>
                     <a:bodyPr/>
@@ -8284,7 +8317,7 @@
                         <a:buNone/>
                       </a:pPr>
                       <a:r>
-                        <a:rPr lang="en-US" sz="890" b="1" dirty="0">
+                        <a:rPr lang="en-US" sz="950" b="1" dirty="0">
                           <a:solidFill>
                             <a:srgbClr val="0B1F3A"/>
                           </a:solidFill>
@@ -8294,14 +8327,14 @@
                         </a:rPr>
                         <a:t>Có người lái: người lái chung khung với xe</a:t>
                       </a:r>
-                      <a:endParaRPr lang="en-US" sz="1020" dirty="0"/>
+                      <a:endParaRPr lang="en-US" sz="1200" dirty="0"/>
                     </a:p>
                     <a:p>
                       <a:pPr algn="l" indent="0" marL="0">
                         <a:buNone/>
                       </a:pPr>
                       <a:r>
-                        <a:rPr lang="en-US" sz="770" dirty="0">
+                        <a:rPr lang="en-US" sz="800" dirty="0">
                           <a:solidFill>
                             <a:srgbClr val="5F7183"/>
                           </a:solidFill>
@@ -8311,7 +8344,7 @@
                         </a:rPr>
                         <a:t>有人騎：騎士和車同一個框</a:t>
                       </a:r>
-                      <a:endParaRPr lang="en-US" sz="1020" dirty="0"/>
+                      <a:endParaRPr lang="en-US" sz="1200" dirty="0"/>
                     </a:p>
                   </a:txBody>
                   <a:tcPr marL="63500" marR="63500" marT="38100" marB="38100" anchor="ctr">
@@ -8362,7 +8395,7 @@
                         <a:buNone/>
                       </a:pPr>
                       <a:r>
-                        <a:rPr lang="en-US" sz="890" dirty="0">
+                        <a:rPr lang="en-US" sz="950" dirty="0">
                           <a:solidFill>
                             <a:srgbClr val="1A2733"/>
                           </a:solidFill>
@@ -8372,7 +8405,7 @@
                         </a:rPr>
                         <a:t>If there is a rider, include the rider in the box.</a:t>
                       </a:r>
-                      <a:endParaRPr lang="en-US" sz="1020" dirty="0"/>
+                      <a:endParaRPr lang="en-US" sz="1200" dirty="0"/>
                     </a:p>
                   </a:txBody>
                   <a:tcPr marL="63500" marR="63500" marT="38100" marB="38100" anchor="ctr">
@@ -8423,7 +8456,7 @@
                         <a:buNone/>
                       </a:pPr>
                       <a:r>
-                        <a:rPr lang="en-US" sz="890" dirty="0">
+                        <a:rPr lang="en-US" sz="950" dirty="0">
                           <a:solidFill>
                             <a:srgbClr val="1A2733"/>
                           </a:solidFill>
@@ -8433,14 +8466,14 @@
                         </a:rPr>
                         <a:t>Người và xe đi cùng nhau</a:t>
                       </a:r>
-                      <a:endParaRPr lang="en-US" sz="1020" dirty="0"/>
+                      <a:endParaRPr lang="en-US" sz="1200" dirty="0"/>
                     </a:p>
                     <a:p>
                       <a:pPr algn="l" indent="0" marL="0">
                         <a:buNone/>
                       </a:pPr>
                       <a:r>
-                        <a:rPr lang="en-US" sz="770" dirty="0">
+                        <a:rPr lang="en-US" sz="800" dirty="0">
                           <a:solidFill>
                             <a:srgbClr val="5F7183"/>
                           </a:solidFill>
@@ -8450,7 +8483,7 @@
                         </a:rPr>
                         <a:t>人和車一起動</a:t>
                       </a:r>
-                      <a:endParaRPr lang="en-US" sz="1020" dirty="0"/>
+                      <a:endParaRPr lang="en-US" sz="1200" dirty="0"/>
                     </a:p>
                   </a:txBody>
                   <a:tcPr marL="63500" marR="63500" marT="38100" marB="38100" anchor="ctr">
@@ -8493,7 +8526,7 @@
                   </a:tcPr>
                 </a:tc>
               </a:tr>
-              <a:tr h="326858">
+              <a:tr h="274320">
                 <a:tc>
                   <a:txBody>
                     <a:bodyPr/>
@@ -8503,7 +8536,7 @@
                         <a:buNone/>
                       </a:pPr>
                       <a:r>
-                        <a:rPr lang="en-US" sz="890" b="1" dirty="0">
+                        <a:rPr lang="en-US" sz="950" b="1" dirty="0">
                           <a:solidFill>
                             <a:srgbClr val="0B1F3A"/>
                           </a:solidFill>
@@ -8513,14 +8546,14 @@
                         </a:rPr>
                         <a:t>Người đứng bên cạnh xe: khoanh riêng</a:t>
                       </a:r>
-                      <a:endParaRPr lang="en-US" sz="1020" dirty="0"/>
+                      <a:endParaRPr lang="en-US" sz="1200" dirty="0"/>
                     </a:p>
                     <a:p>
                       <a:pPr algn="l" indent="0" marL="0">
                         <a:buNone/>
                       </a:pPr>
                       <a:r>
-                        <a:rPr lang="en-US" sz="770" dirty="0">
+                        <a:rPr lang="en-US" sz="800" dirty="0">
                           <a:solidFill>
                             <a:srgbClr val="5F7183"/>
                           </a:solidFill>
@@ -8530,7 +8563,7 @@
                         </a:rPr>
                         <a:t>旁邊站著的人：另外框</a:t>
                       </a:r>
-                      <a:endParaRPr lang="en-US" sz="1020" dirty="0"/>
+                      <a:endParaRPr lang="en-US" sz="1200" dirty="0"/>
                     </a:p>
                   </a:txBody>
                   <a:tcPr marL="63500" marR="63500" marT="38100" marB="38100" anchor="ctr">
@@ -8581,7 +8614,7 @@
                         <a:buNone/>
                       </a:pPr>
                       <a:r>
-                        <a:rPr lang="en-US" sz="890" dirty="0">
+                        <a:rPr lang="en-US" sz="950" dirty="0">
                           <a:solidFill>
                             <a:srgbClr val="1A2733"/>
                           </a:solidFill>
@@ -8591,7 +8624,7 @@
                         </a:rPr>
                         <a:t>…standing next to the motorcycle, do NOT include…</a:t>
                       </a:r>
-                      <a:endParaRPr lang="en-US" sz="1020" dirty="0"/>
+                      <a:endParaRPr lang="en-US" sz="1200" dirty="0"/>
                     </a:p>
                   </a:txBody>
                   <a:tcPr marL="63500" marR="63500" marT="38100" marB="38100" anchor="ctr">
@@ -8642,7 +8675,7 @@
                         <a:buNone/>
                       </a:pPr>
                       <a:r>
-                        <a:rPr lang="en-US" sz="890" dirty="0">
+                        <a:rPr lang="en-US" sz="950" dirty="0">
                           <a:solidFill>
                             <a:srgbClr val="1A2733"/>
                           </a:solidFill>
@@ -8652,14 +8685,14 @@
                         </a:rPr>
                         <a:t>Người đó có thể đi chỗ khác</a:t>
                       </a:r>
-                      <a:endParaRPr lang="en-US" sz="1020" dirty="0"/>
+                      <a:endParaRPr lang="en-US" sz="1200" dirty="0"/>
                     </a:p>
                     <a:p>
                       <a:pPr algn="l" indent="0" marL="0">
                         <a:buNone/>
                       </a:pPr>
                       <a:r>
-                        <a:rPr lang="en-US" sz="770" dirty="0">
+                        <a:rPr lang="en-US" sz="800" dirty="0">
                           <a:solidFill>
                             <a:srgbClr val="5F7183"/>
                           </a:solidFill>
@@ -8669,7 +8702,7 @@
                         </a:rPr>
                         <a:t>那個人可能自己走開</a:t>
                       </a:r>
-                      <a:endParaRPr lang="en-US" sz="1020" dirty="0"/>
+                      <a:endParaRPr lang="en-US" sz="1200" dirty="0"/>
                     </a:p>
                   </a:txBody>
                   <a:tcPr marL="63500" marR="63500" marT="38100" marB="38100" anchor="ctr">
@@ -8712,7 +8745,7 @@
                   </a:tcPr>
                 </a:tc>
               </a:tr>
-              <a:tr h="326858">
+              <a:tr h="274320">
                 <a:tc>
                   <a:txBody>
                     <a:bodyPr/>
@@ -8722,7 +8755,7 @@
                         <a:buNone/>
                       </a:pPr>
                       <a:r>
-                        <a:rPr lang="en-US" sz="890" b="1" dirty="0">
+                        <a:rPr lang="en-US" sz="950" b="1" dirty="0">
                           <a:solidFill>
                             <a:srgbClr val="0B1F3A"/>
                           </a:solidFill>
@@ -8732,14 +8765,14 @@
                         </a:rPr>
                         <a:t>Độ thấy được: 4 mức</a:t>
                       </a:r>
-                      <a:endParaRPr lang="en-US" sz="1020" dirty="0"/>
+                      <a:endParaRPr lang="en-US" sz="1200" dirty="0"/>
                     </a:p>
                     <a:p>
                       <a:pPr algn="l" indent="0" marL="0">
                         <a:buNone/>
                       </a:pPr>
                       <a:r>
-                        <a:rPr lang="en-US" sz="770" dirty="0">
+                        <a:rPr lang="en-US" sz="800" dirty="0">
                           <a:solidFill>
                             <a:srgbClr val="5F7183"/>
                           </a:solidFill>
@@ -8749,7 +8782,7 @@
                         </a:rPr>
                         <a:t>可見度分四級</a:t>
                       </a:r>
-                      <a:endParaRPr lang="en-US" sz="1020" dirty="0"/>
+                      <a:endParaRPr lang="en-US" sz="1200" dirty="0"/>
                     </a:p>
                   </a:txBody>
                   <a:tcPr marL="63500" marR="63500" marT="38100" marB="38100" anchor="ctr">
@@ -8800,7 +8833,7 @@
                         <a:buNone/>
                       </a:pPr>
                       <a:r>
-                        <a:rPr lang="en-US" sz="890" dirty="0">
+                        <a:rPr lang="en-US" sz="950" dirty="0">
                           <a:solidFill>
                             <a:srgbClr val="1A2733"/>
                           </a:solidFill>
@@ -8810,7 +8843,7 @@
                         </a:rPr>
                         <a:t>0–40%, 41–60%, 61–80%, 81–100%</a:t>
                       </a:r>
-                      <a:endParaRPr lang="en-US" sz="1020" dirty="0"/>
+                      <a:endParaRPr lang="en-US" sz="1200" dirty="0"/>
                     </a:p>
                   </a:txBody>
                   <a:tcPr marL="63500" marR="63500" marT="38100" marB="38100" anchor="ctr">
@@ -8861,7 +8894,7 @@
                         <a:buNone/>
                       </a:pPr>
                       <a:r>
-                        <a:rPr lang="en-US" sz="890" dirty="0">
+                        <a:rPr lang="en-US" sz="950" dirty="0">
                           <a:solidFill>
                             <a:srgbClr val="1A2733"/>
                           </a:solidFill>
@@ -8871,14 +8904,14 @@
                         </a:rPr>
                         <a:t>Biết vật nào bị che nhiều</a:t>
                       </a:r>
-                      <a:endParaRPr lang="en-US" sz="1020" dirty="0"/>
+                      <a:endParaRPr lang="en-US" sz="1200" dirty="0"/>
                     </a:p>
                     <a:p>
                       <a:pPr algn="l" indent="0" marL="0">
                         <a:buNone/>
                       </a:pPr>
                       <a:r>
-                        <a:rPr lang="en-US" sz="770" dirty="0">
+                        <a:rPr lang="en-US" sz="800" dirty="0">
                           <a:solidFill>
                             <a:srgbClr val="5F7183"/>
                           </a:solidFill>
@@ -8888,7 +8921,7 @@
                         </a:rPr>
                         <a:t>知道哪些被擋得多</a:t>
                       </a:r>
-                      <a:endParaRPr lang="en-US" sz="1020" dirty="0"/>
+                      <a:endParaRPr lang="en-US" sz="1200" dirty="0"/>
                     </a:p>
                   </a:txBody>
                   <a:tcPr marL="63500" marR="63500" marT="38100" marB="38100" anchor="ctr">
@@ -8937,14 +8970,34 @@
       </p:graphicFrame>
       <p:sp>
         <p:nvSpPr>
-          <p:cNvPr id="4" name="Text 1"/>
+          <p:cNvPr id="4" name="Shape 1"/>
+          <p:cNvSpPr/>
+          <p:nvPr/>
+        </p:nvSpPr>
+        <p:spPr>
+          <a:xfrm>
+            <a:off x="539496" y="4362293"/>
+            <a:ext cx="219456" cy="219456"/>
+          </a:xfrm>
+          <a:prstGeom prst="ellipse">
+            <a:avLst/>
+          </a:prstGeom>
+          <a:solidFill>
+            <a:srgbClr val="D9463E"/>
+          </a:solidFill>
+          <a:ln/>
+        </p:spPr>
+      </p:sp>
+      <p:sp>
+        <p:nvSpPr>
+          <p:cNvPr id="5" name="Text 2"/>
           <p:cNvSpPr txBox="1"/>
           <p:nvPr/>
         </p:nvSpPr>
         <p:spPr>
           <a:xfrm>
-            <a:off x="1108865" y="4240034"/>
-            <a:ext cx="6926270" cy="389116"/>
+            <a:off x="539496" y="4389725"/>
+            <a:ext cx="219456" cy="164592"/>
           </a:xfrm>
           <a:prstGeom prst="rect">
             <a:avLst/>
@@ -8953,60 +9006,134 @@
           <a:ln/>
         </p:spPr>
         <p:txBody>
-          <a:bodyPr wrap="square" lIns="0" tIns="0" rIns="0" bIns="0" rtlCol="0" anchor="t"/>
+          <a:bodyPr wrap="square" lIns="0" tIns="0" rIns="0" bIns="0" rtlCol="0" anchor="ctr"/>
           <a:lstStyle/>
           <a:p>
-            <a:pPr indent="0" marL="0">
-              <a:lnSpc>
-                <a:spcPct val="116000"/>
-              </a:lnSpc>
-              <a:buNone/>
-            </a:pPr>
-            <a:r>
-              <a:rPr lang="en-US" sz="1020" b="1" dirty="0">
-                <a:solidFill>
-                  <a:srgbClr val="007F72"/>
+            <a:pPr algn="ctr" indent="0" marL="0">
+              <a:buNone/>
+            </a:pPr>
+            <a:r>
+              <a:rPr lang="en-US" sz="750" b="1" dirty="0">
+                <a:solidFill>
+                  <a:srgbClr val="FFFFFF"/>
                 </a:solidFill>
                 <a:latin typeface="Arial" pitchFamily="34" charset="0"/>
                 <a:ea typeface="Arial" pitchFamily="34" charset="-122"/>
                 <a:cs typeface="Arial" pitchFamily="34" charset="-120"/>
               </a:rPr>
-              <a:t>nuScenes gán khung 3D; hôm nay chúng ta gán khung 2D trên ảnh, quy tắc giống nhau.</a:t>
-            </a:r>
-            <a:endParaRPr lang="en-US" sz="1020" dirty="0"/>
-          </a:p>
+              <a:t>▶</a:t>
+            </a:r>
+            <a:endParaRPr lang="en-US" sz="750" dirty="0"/>
+          </a:p>
+        </p:txBody>
+      </p:sp>
+      <p:sp>
+        <p:nvSpPr>
+          <p:cNvPr id="6" name="Text 3"/>
+          <p:cNvSpPr txBox="1"/>
+          <p:nvPr/>
+        </p:nvSpPr>
+        <p:spPr>
+          <a:xfrm>
+            <a:off x="832104" y="4334861"/>
+            <a:ext cx="7808976" cy="274320"/>
+          </a:xfrm>
+          <a:prstGeom prst="rect">
+            <a:avLst/>
+          </a:prstGeom>
+          <a:noFill/>
+          <a:ln/>
+        </p:spPr>
+        <p:txBody>
+          <a:bodyPr wrap="square" lIns="0" tIns="0" rIns="0" bIns="0" rtlCol="0" anchor="ctr"/>
+          <a:lstStyle/>
           <a:p>
             <a:pPr indent="0" marL="0">
               <a:lnSpc>
-                <a:spcPct val="116000"/>
+                <a:spcPct val="100000"/>
               </a:lnSpc>
               <a:buNone/>
             </a:pPr>
             <a:r>
-              <a:rPr lang="en-US" sz="940" dirty="0">
-                <a:solidFill>
-                  <a:srgbClr val="007F72"/>
+              <a:rPr lang="en-US" sz="900" b="1" u="sng" dirty="0">
+                <a:solidFill>
+                  <a:srgbClr val="0B1F3A"/>
+                </a:solidFill>
+                <a:latin typeface="Arial" pitchFamily="34" charset="0"/>
+                <a:ea typeface="Arial" pitchFamily="34" charset="-122"/>
+                <a:cs typeface="Arial" pitchFamily="34" charset="-120"/>
+                <a:hlinkClick r:id="rId1" invalidUrl="" action="" tgtFrame="" tooltip="" history="1" highlightClick="0" endSnd="0">
+                  <a:extLst>
+                    <a:ext uri="{A12FA001-AC4F-418D-AE19-62706E023703}">
+                      <ahyp:hlinkClr xmlns:ahyp="http://schemas.microsoft.com/office/drawing/2018/hyperlinkcolor" val="tx"/>
+                    </a:ext>
+                  </a:extLst>
+                </a:hlinkClick>
+              </a:rPr>
+              <a:t>Video: vẽ khung bằng CVAT · </a:t>
+            </a:r>
+            <a:pPr indent="0" marL="0">
+              <a:lnSpc>
+                <a:spcPct val="100000"/>
+              </a:lnSpc>
+              <a:buNone/>
+            </a:pPr>
+            <a:r>
+              <a:rPr lang="en-US" sz="900" b="1" u="sng" dirty="0">
+                <a:solidFill>
+                  <a:srgbClr val="0B1F3A"/>
                 </a:solidFill>
                 <a:latin typeface="微軟正黑體" pitchFamily="34" charset="0"/>
                 <a:ea typeface="微軟正黑體" pitchFamily="34" charset="-122"/>
                 <a:cs typeface="微軟正黑體" pitchFamily="34" charset="-120"/>
-              </a:rPr>
-              <a:t>nuScenes 標的是立體框；今天我們在照片上標平面框，規則一樣。</a:t>
-            </a:r>
-            <a:endParaRPr lang="en-US" sz="1020" dirty="0"/>
+                <a:hlinkClick r:id="rId1" invalidUrl="" action="" tgtFrame="" tooltip="" history="1" highlightClick="0" endSnd="0">
+                  <a:extLst>
+                    <a:ext uri="{A12FA001-AC4F-418D-AE19-62706E023703}">
+                      <ahyp:hlinkClr xmlns:ahyp="http://schemas.microsoft.com/office/drawing/2018/hyperlinkcolor" val="tx"/>
+                    </a:ext>
+                  </a:extLst>
+                </a:hlinkClick>
+              </a:rPr>
+              <a:t>影片：用 CVAT 畫框（標註工具教學）　0:16–2:47　</a:t>
+            </a:r>
+            <a:pPr indent="0" marL="0">
+              <a:lnSpc>
+                <a:spcPct val="100000"/>
+              </a:lnSpc>
+              <a:buNone/>
+            </a:pPr>
+            <a:r>
+              <a:rPr lang="en-US" sz="900" u="sng" dirty="0">
+                <a:solidFill>
+                  <a:srgbClr val="1F6FBF"/>
+                </a:solidFill>
+                <a:latin typeface="Arial" pitchFamily="34" charset="0"/>
+                <a:ea typeface="Arial" pitchFamily="34" charset="-122"/>
+                <a:cs typeface="Arial" pitchFamily="34" charset="-120"/>
+                <a:hlinkClick r:id="rId1" invalidUrl="" action="" tgtFrame="" tooltip="" history="1" highlightClick="0" endSnd="0">
+                  <a:extLst>
+                    <a:ext uri="{A12FA001-AC4F-418D-AE19-62706E023703}">
+                      <ahyp:hlinkClr xmlns:ahyp="http://schemas.microsoft.com/office/drawing/2018/hyperlinkcolor" val="tx"/>
+                    </a:ext>
+                  </a:extLst>
+                </a:hlinkClick>
+              </a:rPr>
+              <a:t>youtu.be/TDae8RkGbKk?t=16</a:t>
+            </a:r>
+            <a:endParaRPr lang="en-US" sz="900" dirty="0"/>
           </a:p>
         </p:txBody>
       </p:sp>
       <p:pic>
         <p:nvPicPr>
-          <p:cNvPr id="6" name="Image 0" descr="/Users/tsengchenghsun/Class/carClass/Claude outputs/第八週(10-29)/src/logo.png">    </p:cNvPr>
+          <p:cNvPr id="8" name="Image 0" descr="/Users/tsengchenghsun/Class/carClass/Claude outputs/第八週(10-29)/src/logo.png">    </p:cNvPr>
           <p:cNvPicPr>
             <a:picLocks noChangeAspect="1"/>
           </p:cNvPicPr>
           <p:nvPr/>
         </p:nvPicPr>
         <p:blipFill>
-          <a:blip r:embed="rId1"/>
+          <a:blip r:embed="rId2"/>
           <a:stretch>
             <a:fillRect/>
           </a:stretch>
@@ -9023,14 +9150,14 @@
       </p:pic>
       <p:sp>
         <p:nvSpPr>
-          <p:cNvPr id="7" name="Text 2"/>
+          <p:cNvPr id="9" name="Text 4"/>
           <p:cNvSpPr txBox="1"/>
           <p:nvPr/>
         </p:nvSpPr>
         <p:spPr>
           <a:xfrm>
-            <a:off x="774225" y="108953"/>
-            <a:ext cx="700409" cy="217905"/>
+            <a:off x="109728" y="128016"/>
+            <a:ext cx="822960" cy="256032"/>
           </a:xfrm>
           <a:prstGeom prst="rect">
             <a:avLst/>
@@ -9046,7 +9173,7 @@
               <a:buNone/>
             </a:pPr>
             <a:r>
-              <a:rPr lang="en-US" sz="770" dirty="0">
+              <a:rPr lang="en-US" sz="900" dirty="0">
                 <a:solidFill>
                   <a:srgbClr val="5F7183"/>
                 </a:solidFill>
@@ -9056,20 +9183,20 @@
               </a:rPr>
               <a:t>4 / 11</a:t>
             </a:r>
-            <a:endParaRPr lang="en-US" sz="770" dirty="0"/>
+            <a:endParaRPr lang="en-US" sz="900" dirty="0"/>
           </a:p>
         </p:txBody>
       </p:sp>
       <p:sp>
         <p:nvSpPr>
-          <p:cNvPr id="8" name="Text 3"/>
+          <p:cNvPr id="10" name="Text 5"/>
           <p:cNvSpPr txBox="1"/>
           <p:nvPr/>
         </p:nvSpPr>
         <p:spPr>
           <a:xfrm>
-            <a:off x="1497981" y="108953"/>
-            <a:ext cx="1712112" cy="217905"/>
+            <a:off x="960120" y="128016"/>
+            <a:ext cx="2011680" cy="256032"/>
           </a:xfrm>
           <a:prstGeom prst="rect">
             <a:avLst/>
@@ -9085,7 +9212,7 @@
               <a:buNone/>
             </a:pPr>
             <a:r>
-              <a:rPr lang="en-US" sz="770" dirty="0">
+              <a:rPr lang="en-US" sz="900" dirty="0">
                 <a:solidFill>
                   <a:srgbClr val="5F7183"/>
                 </a:solidFill>
@@ -9095,7 +9222,7 @@
               </a:rPr>
               <a:t>Tiết 2 · 第 2 節</a:t>
             </a:r>
-            <a:endParaRPr lang="en-US" sz="770" dirty="0"/>
+            <a:endParaRPr lang="en-US" sz="900" dirty="0"/>
           </a:p>
         </p:txBody>
       </p:sp>

--- a/第八週(10-29)/第八週_第2節_簡報.pptx
+++ b/第八週(10-29)/第八週_第2節_簡報.pptx
@@ -3342,7 +3342,29 @@
                 <a:ea typeface="Arial Unicode MS"/>
                 <a:cs typeface="Arial Unicode MS"/>
               </a:rPr>
-              <a:t>，就畫出一個框。畫錯了，點一下那個框選起來，按「刪掉」，或直接按另一個類別改掉。
+              <a:t>，就畫出一個框。畫好的框不夠貼？點一下那個框選起來，框的四個角和四邊會出現</a:t>
+            </a:r>
+            <a:r>
+              <a:rPr sz="1500" b="1" lang="zh-TW" dirty="0">
+                <a:solidFill>
+                  <a:srgbClr val="000000"/>
+                </a:solidFill>
+                <a:latin typeface="Arial Unicode MS"/>
+                <a:ea typeface="Arial Unicode MS"/>
+                <a:cs typeface="Arial Unicode MS"/>
+              </a:rPr>
+              <a:t>白色小方塊</a:t>
+            </a:r>
+            <a:r>
+              <a:rPr sz="1500" lang="zh-TW" dirty="0">
+                <a:solidFill>
+                  <a:srgbClr val="000000"/>
+                </a:solidFill>
+                <a:latin typeface="Arial Unicode MS"/>
+                <a:ea typeface="Arial Unicode MS"/>
+                <a:cs typeface="Arial Unicode MS"/>
+              </a:rPr>
+              <a:t>：拖小方塊可以調大小，拖框的中間可以整個移動；用電腦的話，方向鍵可以一格一格微調。畫錯了，選起來按「刪掉」，或直接按另一個類別改掉。
 </a:t>
             </a:r>
           </a:p>

--- a/第八週(10-29)/第八週_第2節_簡報.pptx
+++ b/第八週(10-29)/第八週_第2節_簡報.pptx
@@ -3364,7 +3364,29 @@
                 <a:ea typeface="Arial Unicode MS"/>
                 <a:cs typeface="Arial Unicode MS"/>
               </a:rPr>
-              <a:t>：拖小方塊可以調大小，拖框的中間可以整個移動；用電腦的話，方向鍵可以一格一格微調。畫錯了，選起來按「刪掉」，或直接按另一個類別改掉。
+              <a:t>：拖小方塊可以調大小，拖框的中間可以整個移動；用電腦的話，方向鍵可以一格一格微調。行人常常疊在一起：在同一個地方</a:t>
+            </a:r>
+            <a:r>
+              <a:rPr sz="1500" b="1" lang="zh-TW" dirty="0">
+                <a:solidFill>
+                  <a:srgbClr val="000000"/>
+                </a:solidFill>
+                <a:latin typeface="Arial Unicode MS"/>
+                <a:ea typeface="Arial Unicode MS"/>
+                <a:cs typeface="Arial Unicode MS"/>
+              </a:rPr>
+              <a:t>再點一下</a:t>
+            </a:r>
+            <a:r>
+              <a:rPr sz="1500" lang="zh-TW" dirty="0">
+                <a:solidFill>
+                  <a:srgbClr val="000000"/>
+                </a:solidFill>
+                <a:latin typeface="Arial Unicode MS"/>
+                <a:ea typeface="Arial Unicode MS"/>
+                <a:cs typeface="Arial Unicode MS"/>
+              </a:rPr>
+              <a:t>，就會換選下面那個框。剛畫好的框不會自動選起來，所以可以接著在旁邊畫下一個。畫錯了，選起來按「刪掉」，或直接按另一個類別改掉。
 </a:t>
             </a:r>
           </a:p>

--- a/第八週(10-29)/第八週_第2節_簡報.pptx
+++ b/第八週(10-29)/第八週_第2節_簡報.pptx
@@ -460,7 +460,7 @@
                 <a:ea typeface="Arial Unicode MS"/>
                 <a:cs typeface="Arial Unicode MS"/>
               </a:rPr>
-              <a:t>讓大家知道，模型學得好不好，取決於標準答案標得好不好；自己動手標一次，就知道標註有多花工、規則有多重要。
+              <a:t>讓大家知道，模型學得好不好，取決於標準答案標得好不好；自己動手標一次，就會知道標註要花多少工夫，以及標註規則有多重要。
 </a:t>
             </a:r>
           </a:p>
@@ -1032,7 +1032,7 @@
                 <a:ea typeface="Arial Unicode MS"/>
                 <a:cs typeface="Arial Unicode MS"/>
               </a:rPr>
-              <a:t>漏標、標錯、每個人標法不一樣，模型都會跟著學錯。
+              <a:t>該標的沒標到、類別標錯、每個人的標法不一樣，模型都會跟著學錯。
 </a:t>
             </a:r>
           </a:p>
@@ -1065,7 +1065,7 @@
                 <a:ea typeface="Arial Unicode MS"/>
                 <a:cs typeface="Arial Unicode MS"/>
               </a:rPr>
-              <a:t>規則要先寫清楚，所有人照同一份。</a:t>
+              <a:t>規則要先寫清楚，所有標註的人都照同一份規則標。</a:t>
             </a:r>
             <a:r>
               <a:rPr sz="1600" lang="zh-TW" dirty="0">
@@ -1120,7 +1120,7 @@
                 <a:ea typeface="Arial Unicode MS"/>
                 <a:cs typeface="Arial Unicode MS"/>
               </a:rPr>
-              <a:t>，用來量兩個框有多像。今天的四張照片，天黑、被擋住的那幾個，大家和 AI 都比較容易漏。
+              <a:t>，用來量兩個框有多像。今天的四張照片，天黑、被擋住的那幾個，不管是大家還是 AI，都比較容易漏掉。
 </a:t>
             </a:r>
           </a:p>
@@ -1296,7 +1296,7 @@
                 <a:ea typeface="Arial Unicode MS"/>
                 <a:cs typeface="Arial Unicode MS"/>
               </a:rPr>
-              <a:t>讓大家知道，標註資料就是模型的課本：標錯、漏標、每個人標法不一樣，模型都會跟著學壞。
+              <a:t>讓大家知道，標註資料就是模型的課本：不管是類別標錯、該標的沒有標到，還是每個人的標法不一樣，模型都會跟著學到錯的東西。
 </a:t>
             </a:r>
           </a:p>
@@ -1714,7 +1714,7 @@
                 <a:ea typeface="Arial Unicode MS"/>
                 <a:cs typeface="Arial Unicode MS"/>
               </a:rPr>
-              <a:t>讓大家感受一份正式的標註資料有多大，也看到它的偏向：機車很少。
+              <a:t>讓大家感受一份正式的標註資料有多大，也看到這份資料有偏向：裡面機車的框很少。
 </a:t>
             </a:r>
           </a:p>
@@ -2077,7 +2077,7 @@
                 <a:ea typeface="Arial Unicode MS"/>
                 <a:cs typeface="Arial Unicode MS"/>
               </a:rPr>
-              <a:t>第一條：有一個光達或雷達點就要標。</a:t>
+              <a:t>第一條：只要有一個光達或雷達的點打在物體上，就要標。</a:t>
             </a:r>
             <a:r>
               <a:rPr sz="1250" lang="zh-TW" dirty="0">
@@ -2088,7 +2088,7 @@
                 <a:ea typeface="Arial Unicode MS"/>
                 <a:cs typeface="Arial Unicode MS"/>
               </a:rPr>
-              <a:t>標準很低，一個點就算。理由是：只要感測器看得到，車子就可能要對它反應，模型就該學。
+              <a:t>這個標準很低，只要有一個點就算數。理由是：只要感測器看得到，車子就可能要對它反應，模型就該學。
 </a:t>
             </a:r>
           </a:p>
@@ -3628,7 +3628,7 @@
                 <a:ea typeface="Arial Unicode MS"/>
                 <a:cs typeface="Arial Unicode MS"/>
               </a:rPr>
-              <a:t>讓大家在兩張白天的照片上實際標框，感受「框要貼、要一個一個分開」有多費工。
+              <a:t>讓大家在兩張白天的照片上實際標框，感受「框要貼緊物體、每一個物體要分開各框一個」要花多少工夫。
 </a:t>
             </a:r>
           </a:p>
@@ -3760,7 +3760,7 @@
                 <a:ea typeface="Arial Unicode MS"/>
                 <a:cs typeface="Arial Unicode MS"/>
               </a:rPr>
-              <a:t>答案參考：上一節那個模型，任務一七個框到七個；任務二九個框到八個。大家可以比比看，自己有沒有贏過模型。</a:t>
+              <a:t>答案參考：上一節那個模型，任務一的七個全部框到；任務二的九個，框到其中八個。大家可以比比看，自己有沒有贏過模型。</a:t>
             </a:r>
           </a:p>
         </p:txBody>
@@ -3869,11 +3869,11 @@
                 <a:spcPts val="0"/>
               </a:spcBef>
               <a:spcAft>
-                <a:spcPts val="267"/>
+                <a:spcPts val="250"/>
               </a:spcAft>
             </a:pPr>
             <a:r>
-              <a:rPr sz="1600" b="1" lang="zh-TW" dirty="0">
+              <a:rPr sz="1500" b="1" lang="zh-TW" dirty="0">
                 <a:solidFill>
                   <a:srgbClr val="000000"/>
                 </a:solidFill>
@@ -3884,15 +3884,15 @@
               <a:t>這一張的目的：</a:t>
             </a:r>
             <a:r>
-              <a:rPr sz="1600" lang="zh-TW" dirty="0">
-                <a:solidFill>
-                  <a:srgbClr val="000000"/>
-                </a:solidFill>
-                <a:latin typeface="Arial Unicode MS"/>
-                <a:ea typeface="Arial Unicode MS"/>
-                <a:cs typeface="Arial Unicode MS"/>
-              </a:rPr>
-              <a:t>讓大家在被擋住、天黑的照片上標，自己體會這些就是模型最容易漏的情況，人也一樣會漏。
+              <a:rPr sz="1500" lang="zh-TW" dirty="0">
+                <a:solidFill>
+                  <a:srgbClr val="000000"/>
+                </a:solidFill>
+                <a:latin typeface="Arial Unicode MS"/>
+                <a:ea typeface="Arial Unicode MS"/>
+                <a:cs typeface="Arial Unicode MS"/>
+              </a:rPr>
+              <a:t>讓大家在有東西被擋住、天黑的照片上標，自己體會到，被擋住和天黑正是模型最容易漏掉的情況，而人在這些情況下也一樣會漏掉。
 </a:t>
             </a:r>
           </a:p>
@@ -3902,11 +3902,11 @@
                 <a:spcPts val="0"/>
               </a:spcBef>
               <a:spcAft>
-                <a:spcPts val="267"/>
+                <a:spcPts val="250"/>
               </a:spcAft>
             </a:pPr>
             <a:r>
-              <a:rPr sz="1600" lang="zh-TW" dirty="0">
+              <a:rPr sz="1500" lang="zh-TW" dirty="0">
                 <a:solidFill>
                   <a:srgbClr val="000000"/>
                 </a:solidFill>
@@ -3924,11 +3924,11 @@
                 <a:spcPts val="0"/>
               </a:spcBef>
               <a:spcAft>
-                <a:spcPts val="267"/>
+                <a:spcPts val="250"/>
               </a:spcAft>
             </a:pPr>
             <a:r>
-              <a:rPr sz="1600" b="1" lang="zh-TW" dirty="0">
+              <a:rPr sz="1500" b="1" lang="zh-TW" dirty="0">
                 <a:solidFill>
                   <a:srgbClr val="000000"/>
                 </a:solidFill>
@@ -3939,7 +3939,7 @@
               <a:t>任務三，波士頓的街道。</a:t>
             </a:r>
             <a:r>
-              <a:rPr sz="1600" lang="zh-TW" dirty="0">
+              <a:rPr sz="1500" lang="zh-TW" dirty="0">
                 <a:solidFill>
                   <a:srgbClr val="000000"/>
                 </a:solidFill>
@@ -3957,11 +3957,11 @@
                 <a:spcPts val="0"/>
               </a:spcBef>
               <a:spcAft>
-                <a:spcPts val="267"/>
+                <a:spcPts val="250"/>
               </a:spcAft>
             </a:pPr>
             <a:r>
-              <a:rPr sz="1600" b="1" lang="zh-TW" dirty="0">
+              <a:rPr sz="1500" b="1" lang="zh-TW" dirty="0">
                 <a:solidFill>
                   <a:srgbClr val="000000"/>
                 </a:solidFill>
@@ -3972,7 +3972,7 @@
               <a:t>任務四，新加坡晚上，剛下過雨。</a:t>
             </a:r>
             <a:r>
-              <a:rPr sz="1600" lang="zh-TW" dirty="0">
+              <a:rPr sz="1500" lang="zh-TW" dirty="0">
                 <a:solidFill>
                   <a:srgbClr val="000000"/>
                 </a:solidFill>
@@ -3990,11 +3990,11 @@
                 <a:spcPts val="0"/>
               </a:spcBef>
               <a:spcAft>
-                <a:spcPts val="267"/>
+                <a:spcPts val="250"/>
               </a:spcAft>
             </a:pPr>
             <a:r>
-              <a:rPr sz="1600" lang="zh-TW" dirty="0">
+              <a:rPr sz="1500" lang="zh-TW" dirty="0">
                 <a:solidFill>
                   <a:srgbClr val="000000"/>
                 </a:solidFill>
@@ -4005,7 +4005,7 @@
               <a:t>這一張很有意思：</a:t>
             </a:r>
             <a:r>
-              <a:rPr sz="1600" b="1" lang="zh-TW" dirty="0">
+              <a:rPr sz="1500" b="1" lang="zh-TW" dirty="0">
                 <a:solidFill>
                   <a:srgbClr val="000000"/>
                 </a:solidFill>
@@ -4016,15 +4016,15 @@
               <a:t>上一節那個模型，九個只框到四個。</a:t>
             </a:r>
             <a:r>
-              <a:rPr sz="1600" lang="zh-TW" dirty="0">
-                <a:solidFill>
-                  <a:srgbClr val="000000"/>
-                </a:solidFill>
-                <a:latin typeface="Arial Unicode MS"/>
-                <a:ea typeface="Arial Unicode MS"/>
-                <a:cs typeface="Arial Unicode MS"/>
-              </a:rPr>
-              <a:t>大部分同學應該可以框到比它多。這就是上一節那張圖說的：晚上，模型漏得多。可是也請注意，人也會漏，尤其是很暗、很小的那幾個。
+              <a:rPr sz="1500" lang="zh-TW" dirty="0">
+                <a:solidFill>
+                  <a:srgbClr val="000000"/>
+                </a:solidFill>
+                <a:latin typeface="Arial Unicode MS"/>
+                <a:ea typeface="Arial Unicode MS"/>
+                <a:cs typeface="Arial Unicode MS"/>
+              </a:rPr>
+              <a:t>大部分同學應該可以框到比它多。這就是上一節那張圖說的：到了晚上，模型漏掉的比較多。可是也請注意，人也會漏，尤其是很暗、很小的那幾個。
 </a:t>
             </a:r>
           </a:p>
@@ -4034,11 +4034,11 @@
                 <a:spcPts val="0"/>
               </a:spcBef>
               <a:spcAft>
-                <a:spcPts val="267"/>
+                <a:spcPts val="250"/>
               </a:spcAft>
             </a:pPr>
             <a:r>
-              <a:rPr sz="1600" lang="zh-TW" dirty="0">
+              <a:rPr sz="1500" lang="zh-TW" dirty="0">
                 <a:solidFill>
                   <a:srgbClr val="000000"/>
                 </a:solidFill>
@@ -4056,11 +4056,11 @@
                 <a:spcPts val="0"/>
               </a:spcBef>
               <a:spcAft>
-                <a:spcPts val="267"/>
+                <a:spcPts val="250"/>
               </a:spcAft>
             </a:pPr>
             <a:r>
-              <a:rPr sz="1600" lang="zh-TW" dirty="0">
+              <a:rPr sz="1500" lang="zh-TW" dirty="0">
                 <a:solidFill>
                   <a:srgbClr val="000000"/>
                 </a:solidFill>

--- a/第八週(10-29)/第八週_第2節_簡報.pptx
+++ b/第八週(10-29)/第八週_第2節_簡報.pptx
@@ -2428,11 +2428,11 @@
                 <a:spcPts val="0"/>
               </a:spcBef>
               <a:spcAft>
-                <a:spcPts val="267"/>
+                <a:spcPts val="233"/>
               </a:spcAft>
             </a:pPr>
             <a:r>
-              <a:rPr sz="1600" b="1" lang="zh-TW" dirty="0">
+              <a:rPr sz="1400" b="1" lang="zh-TW" dirty="0">
                 <a:solidFill>
                   <a:srgbClr val="000000"/>
                 </a:solidFill>
@@ -2443,15 +2443,15 @@
               <a:t>這一張的目的：</a:t>
             </a:r>
             <a:r>
-              <a:rPr sz="1600" lang="zh-TW" dirty="0">
-                <a:solidFill>
-                  <a:srgbClr val="000000"/>
-                </a:solidFill>
-                <a:latin typeface="Arial Unicode MS"/>
-                <a:ea typeface="Arial Unicode MS"/>
-                <a:cs typeface="Arial Unicode MS"/>
-              </a:rPr>
-              <a:t>讓大家看到騎士規則的真實例子，也想一想這條規則在越南、台灣的意義。
+              <a:rPr sz="1400" lang="zh-TW" dirty="0">
+                <a:solidFill>
+                  <a:srgbClr val="000000"/>
+                </a:solidFill>
+                <a:latin typeface="Arial Unicode MS"/>
+                <a:ea typeface="Arial Unicode MS"/>
+                <a:cs typeface="Arial Unicode MS"/>
+              </a:rPr>
+              <a:t>讓大家知道三件事。第一，有人騎的機車和腳踏車，騎士要和車包在同一個框裡，騎士不另外框成行人。第二，nuScenes 還會在這台車上記一個屬性「有人騎」或「沒人騎」。第三，這條規則在河內、台北很重要，而且整份資料要用同一套規則。
 </a:t>
             </a:r>
           </a:p>
@@ -2461,11 +2461,11 @@
                 <a:spcPts val="0"/>
               </a:spcBef>
               <a:spcAft>
-                <a:spcPts val="267"/>
+                <a:spcPts val="233"/>
               </a:spcAft>
             </a:pPr>
             <a:r>
-              <a:rPr sz="1600" lang="zh-TW" dirty="0">
+              <a:rPr sz="1400" lang="zh-TW" dirty="0">
                 <a:solidFill>
                   <a:srgbClr val="000000"/>
                 </a:solidFill>
@@ -2476,7 +2476,7 @@
               <a:t>左邊是波士頓一個騎腳踏車的人，右邊是新加坡晚上一台機車，騎士穿深色衣服。兩個框都是 nuScenes 官方的標註，請看框的上緣：</a:t>
             </a:r>
             <a:r>
-              <a:rPr sz="1600" b="1" lang="zh-TW" dirty="0">
+              <a:rPr sz="1400" b="1" lang="zh-TW" dirty="0">
                 <a:solidFill>
                   <a:srgbClr val="000000"/>
                 </a:solidFill>
@@ -2487,7 +2487,7 @@
               <a:t>都包到騎士的頭</a:t>
             </a:r>
             <a:r>
-              <a:rPr sz="1600" lang="zh-TW" dirty="0">
+              <a:rPr sz="1400" lang="zh-TW" dirty="0">
                 <a:solidFill>
                   <a:srgbClr val="000000"/>
                 </a:solidFill>
@@ -2505,11 +2505,11 @@
                 <a:spcPts val="0"/>
               </a:spcBef>
               <a:spcAft>
-                <a:spcPts val="267"/>
+                <a:spcPts val="233"/>
               </a:spcAft>
             </a:pPr>
             <a:r>
-              <a:rPr sz="1600" lang="zh-TW" dirty="0">
+              <a:rPr sz="1400" lang="zh-TW" dirty="0">
                 <a:solidFill>
                   <a:srgbClr val="000000"/>
                 </a:solidFill>
@@ -2527,11 +2527,11 @@
                 <a:spcPts val="0"/>
               </a:spcBef>
               <a:spcAft>
-                <a:spcPts val="267"/>
+                <a:spcPts val="233"/>
               </a:spcAft>
             </a:pPr>
             <a:r>
-              <a:rPr sz="1600" lang="zh-TW" dirty="0">
+              <a:rPr sz="1400" lang="zh-TW" dirty="0">
                 <a:solidFill>
                   <a:srgbClr val="000000"/>
                 </a:solidFill>
@@ -2542,7 +2542,7 @@
               <a:t>想一下河內的路口：一台機車上載了三個人，大人前面還站一個小孩。照 nuScenes 的規則，這是</a:t>
             </a:r>
             <a:r>
-              <a:rPr sz="1600" b="1" lang="zh-TW" dirty="0">
+              <a:rPr sz="1400" b="1" lang="zh-TW" dirty="0">
                 <a:solidFill>
                   <a:srgbClr val="000000"/>
                 </a:solidFill>
@@ -2553,15 +2553,15 @@
               <a:t>一個框</a:t>
             </a:r>
             <a:r>
-              <a:rPr sz="1600" lang="zh-TW" dirty="0">
-                <a:solidFill>
-                  <a:srgbClr val="000000"/>
-                </a:solidFill>
-                <a:latin typeface="Arial Unicode MS"/>
-                <a:ea typeface="Arial Unicode MS"/>
-                <a:cs typeface="Arial Unicode MS"/>
-              </a:rPr>
-              <a:t>，類別是機車，屬性寫「有人騎」。模型學到的是「一台機車」。
+              <a:rPr sz="1400" lang="zh-TW" dirty="0">
+                <a:solidFill>
+                  <a:srgbClr val="000000"/>
+                </a:solidFill>
+                <a:latin typeface="Arial Unicode MS"/>
+                <a:ea typeface="Arial Unicode MS"/>
+                <a:cs typeface="Arial Unicode MS"/>
+              </a:rPr>
+              <a:t>，類別是機車，屬性寫「有人騎」。模型學到的是「一台機車」。nuScenes 真的有這個屬性：每一台機車、腳踏車都記了「有人騎」或「沒人騎」。我們用的 mini 版裡，機車有人騎的有 176 個框、沒人騎的有 295 個；腳踏車有人騎的有 104 個、沒人騎的有 139 個。要注意，這個屬性只記「有沒有人騎」，不記騎了幾個人；所以照 nuScenes 的標法，載一個人和載三個人的機車，在資料裡看起來是一樣的。
 </a:t>
             </a:r>
           </a:p>
@@ -2571,11 +2571,11 @@
                 <a:spcPts val="0"/>
               </a:spcBef>
               <a:spcAft>
-                <a:spcPts val="267"/>
+                <a:spcPts val="233"/>
               </a:spcAft>
             </a:pPr>
             <a:r>
-              <a:rPr sz="1600" lang="zh-TW" dirty="0">
+              <a:rPr sz="1400" lang="zh-TW" dirty="0">
                 <a:solidFill>
                   <a:srgbClr val="000000"/>
                 </a:solidFill>
@@ -2586,7 +2586,7 @@
               <a:t>如果換一套規則，把每個人分開框，模型學到的就是「三個人加一台機車」。兩套規則都可以，</a:t>
             </a:r>
             <a:r>
-              <a:rPr sz="1600" b="1" lang="zh-TW" dirty="0">
+              <a:rPr sz="1400" b="1" lang="zh-TW" dirty="0">
                 <a:solidFill>
                   <a:srgbClr val="000000"/>
                 </a:solidFill>
@@ -2597,7 +2597,7 @@
               <a:t>重點是整份資料要用同一套</a:t>
             </a:r>
             <a:r>
-              <a:rPr sz="1600" lang="zh-TW" dirty="0">
+              <a:rPr sz="1400" lang="zh-TW" dirty="0">
                 <a:solidFill>
                   <a:srgbClr val="000000"/>
                 </a:solidFill>
@@ -2615,19 +2615,19 @@
                 <a:spcPts val="0"/>
               </a:spcBef>
               <a:spcAft>
-                <a:spcPts val="267"/>
+                <a:spcPts val="233"/>
               </a:spcAft>
             </a:pPr>
             <a:r>
-              <a:rPr sz="1600" lang="zh-TW" dirty="0">
-                <a:solidFill>
-                  <a:srgbClr val="000000"/>
-                </a:solidFill>
-                <a:latin typeface="Arial Unicode MS"/>
-                <a:ea typeface="Arial Unicode MS"/>
-                <a:cs typeface="Arial Unicode MS"/>
-              </a:rPr>
-              <a:t>等一下上機，規則第三條就是這一條。停車場那張有好幾台停著的機車，沒有人騎；如果你看到旁邊站著人，記得另外框。</a:t>
+              <a:rPr sz="1400" lang="zh-TW" dirty="0">
+                <a:solidFill>
+                  <a:srgbClr val="000000"/>
+                </a:solidFill>
+                <a:latin typeface="Arial Unicode MS"/>
+                <a:ea typeface="Arial Unicode MS"/>
+                <a:cs typeface="Arial Unicode MS"/>
+              </a:rPr>
+              <a:t>等一下上機，規則第三條就是這一條：把騎士包進同一個框，類別選「機車・腳踏車」。今天的練習台不用標屬性；對答案的時候，答案表上會顯示官方標的「有人騎」或「沒人騎」。停車場那張有好幾台停著的機車，沒有人騎；如果你看到旁邊站著人，記得另外框。</a:t>
             </a:r>
           </a:p>
         </p:txBody>

--- a/第八週(10-29)/第八週_第2節_簡報.pptx
+++ b/第八週(10-29)/第八週_第2節_簡報.pptx
@@ -2736,11 +2736,11 @@
                 <a:spcPts val="0"/>
               </a:spcBef>
               <a:spcAft>
-                <a:spcPts val="233"/>
+                <a:spcPts val="167"/>
               </a:spcAft>
             </a:pPr>
             <a:r>
-              <a:rPr sz="1400" b="1" lang="zh-TW" dirty="0">
+              <a:rPr sz="1000" b="1" lang="zh-TW" dirty="0">
                 <a:solidFill>
                   <a:srgbClr val="000000"/>
                 </a:solidFill>
@@ -2751,15 +2751,15 @@
               <a:t>這一張的目的：</a:t>
             </a:r>
             <a:r>
-              <a:rPr sz="1400" lang="zh-TW" dirty="0">
-                <a:solidFill>
-                  <a:srgbClr val="000000"/>
-                </a:solidFill>
-                <a:latin typeface="Arial Unicode MS"/>
-                <a:ea typeface="Arial Unicode MS"/>
-                <a:cs typeface="Arial Unicode MS"/>
-              </a:rPr>
-              <a:t>讓大家會用 IoU 判斷兩個框有多像：重疊的面積除以合起來的面積。
+              <a:rPr sz="1000" lang="zh-TW" dirty="0">
+                <a:solidFill>
+                  <a:srgbClr val="000000"/>
+                </a:solidFill>
+                <a:latin typeface="Arial Unicode MS"/>
+                <a:ea typeface="Arial Unicode MS"/>
+                <a:cs typeface="Arial Unicode MS"/>
+              </a:rPr>
+              <a:t>讓大家會用 IoU 判斷兩個框有多像：重疊的面積除以合起來的面積。也讓大家知道為什麼要算它：要判斷一個框算不算「框到」，需要一個不受物體大小影響的數字；而且對答案、去掉重複的框、訓練模型、檢查標註，都會用到它。
 </a:t>
             </a:r>
           </a:p>
@@ -2769,11 +2769,11 @@
                 <a:spcPts val="0"/>
               </a:spcBef>
               <a:spcAft>
-                <a:spcPts val="233"/>
+                <a:spcPts val="167"/>
               </a:spcAft>
             </a:pPr>
             <a:r>
-              <a:rPr sz="1400" lang="zh-TW" dirty="0">
+              <a:rPr sz="1000" lang="zh-TW" dirty="0">
                 <a:solidFill>
                   <a:srgbClr val="000000"/>
                 </a:solidFill>
@@ -2784,7 +2784,7 @@
               <a:t>我框的跟答案不完全一樣，算對還是算錯？要有一個數字來量，這個數字叫 </a:t>
             </a:r>
             <a:r>
-              <a:rPr sz="1400" b="1" lang="zh-TW" dirty="0">
+              <a:rPr sz="1000" b="1" lang="zh-TW" dirty="0">
                 <a:solidFill>
                   <a:srgbClr val="000000"/>
                 </a:solidFill>
@@ -2795,7 +2795,7 @@
               <a:t>IoU</a:t>
             </a:r>
             <a:r>
-              <a:rPr sz="1400" lang="zh-TW" dirty="0">
+              <a:rPr sz="1000" lang="zh-TW" dirty="0">
                 <a:solidFill>
                   <a:srgbClr val="000000"/>
                 </a:solidFill>
@@ -2806,7 +2806,7 @@
               <a:t>，英文是 Intersection over Union，</a:t>
             </a:r>
             <a:r>
-              <a:rPr sz="1400" b="1" lang="zh-TW" dirty="0">
+              <a:rPr sz="1000" b="1" lang="zh-TW" dirty="0">
                 <a:solidFill>
                   <a:srgbClr val="000000"/>
                 </a:solidFill>
@@ -2817,7 +2817,7 @@
               <a:t>交集除以聯集</a:t>
             </a:r>
             <a:r>
-              <a:rPr sz="1400" lang="zh-TW" dirty="0">
+              <a:rPr sz="1000" lang="zh-TW" dirty="0">
                 <a:solidFill>
                   <a:srgbClr val="000000"/>
                 </a:solidFill>
@@ -2835,11 +2835,11 @@
                 <a:spcPts val="0"/>
               </a:spcBef>
               <a:spcAft>
-                <a:spcPts val="233"/>
+                <a:spcPts val="167"/>
               </a:spcAft>
             </a:pPr>
             <a:r>
-              <a:rPr sz="1400" lang="zh-TW" dirty="0">
+              <a:rPr sz="1000" lang="zh-TW" dirty="0">
                 <a:solidFill>
                   <a:srgbClr val="000000"/>
                 </a:solidFill>
@@ -2857,11 +2857,11 @@
                 <a:spcPts val="0"/>
               </a:spcBef>
               <a:spcAft>
-                <a:spcPts val="233"/>
+                <a:spcPts val="167"/>
               </a:spcAft>
             </a:pPr>
             <a:r>
-              <a:rPr sz="1400" b="1" lang="zh-TW" dirty="0">
+              <a:rPr sz="1000" b="1" lang="zh-TW" dirty="0">
                 <a:solidFill>
                   <a:srgbClr val="000000"/>
                 </a:solidFill>
@@ -2872,7 +2872,7 @@
               <a:t>重疊的部分</a:t>
             </a:r>
             <a:r>
-              <a:rPr sz="1400" lang="zh-TW" dirty="0">
+              <a:rPr sz="1000" lang="zh-TW" dirty="0">
                 <a:solidFill>
                   <a:srgbClr val="000000"/>
                 </a:solidFill>
@@ -2883,7 +2883,7 @@
               <a:t>，就是交集。</a:t>
             </a:r>
             <a:r>
-              <a:rPr sz="1400" b="1" lang="zh-TW" dirty="0">
+              <a:rPr sz="1000" b="1" lang="zh-TW" dirty="0">
                 <a:solidFill>
                   <a:srgbClr val="000000"/>
                 </a:solidFill>
@@ -2894,7 +2894,7 @@
               <a:t>兩張紙合起來蓋住桌子的面積</a:t>
             </a:r>
             <a:r>
-              <a:rPr sz="1400" lang="zh-TW" dirty="0">
+              <a:rPr sz="1000" lang="zh-TW" dirty="0">
                 <a:solidFill>
                   <a:srgbClr val="000000"/>
                 </a:solidFill>
@@ -2912,11 +2912,11 @@
                 <a:spcPts val="0"/>
               </a:spcBef>
               <a:spcAft>
-                <a:spcPts val="233"/>
+                <a:spcPts val="167"/>
               </a:spcAft>
             </a:pPr>
             <a:r>
-              <a:rPr sz="1400" lang="zh-TW" dirty="0">
+              <a:rPr sz="1000" lang="zh-TW" dirty="0">
                 <a:solidFill>
                   <a:srgbClr val="000000"/>
                 </a:solidFill>
@@ -2934,11 +2934,11 @@
                 <a:spcPts val="0"/>
               </a:spcBef>
               <a:spcAft>
-                <a:spcPts val="233"/>
+                <a:spcPts val="167"/>
               </a:spcAft>
             </a:pPr>
             <a:r>
-              <a:rPr sz="1400" lang="zh-TW" dirty="0">
+              <a:rPr sz="1000" lang="zh-TW" dirty="0">
                 <a:solidFill>
                   <a:srgbClr val="000000"/>
                 </a:solidFill>
@@ -2949,7 +2949,7 @@
               <a:t>看圖。白框是答案，彩色框是示範的學生框，同一個框，愈往右下偏，IoU 愈小。左邊 </a:t>
             </a:r>
             <a:r>
-              <a:rPr sz="1400" b="1" lang="zh-TW" dirty="0">
+              <a:rPr sz="1000" b="1" lang="zh-TW" dirty="0">
                 <a:solidFill>
                   <a:srgbClr val="000000"/>
                 </a:solidFill>
@@ -2960,7 +2960,7 @@
               <a:t>0.91</a:t>
             </a:r>
             <a:r>
-              <a:rPr sz="1400" lang="zh-TW" dirty="0">
+              <a:rPr sz="1000" lang="zh-TW" dirty="0">
                 <a:solidFill>
                   <a:srgbClr val="000000"/>
                 </a:solidFill>
@@ -2971,7 +2971,7 @@
               <a:t>，幾乎一樣；中間 </a:t>
             </a:r>
             <a:r>
-              <a:rPr sz="1400" b="1" lang="zh-TW" dirty="0">
+              <a:rPr sz="1000" b="1" lang="zh-TW" dirty="0">
                 <a:solidFill>
                   <a:srgbClr val="000000"/>
                 </a:solidFill>
@@ -2982,7 +2982,7 @@
               <a:t>0.60</a:t>
             </a:r>
             <a:r>
-              <a:rPr sz="1400" lang="zh-TW" dirty="0">
+              <a:rPr sz="1000" lang="zh-TW" dirty="0">
                 <a:solidFill>
                   <a:srgbClr val="000000"/>
                 </a:solidFill>
@@ -2993,7 +2993,7 @@
               <a:t>，偏了一點，眼睛看起來還不錯；右邊 </a:t>
             </a:r>
             <a:r>
-              <a:rPr sz="1400" b="1" lang="zh-TW" dirty="0">
+              <a:rPr sz="1000" b="1" lang="zh-TW" dirty="0">
                 <a:solidFill>
                   <a:srgbClr val="000000"/>
                 </a:solidFill>
@@ -3004,7 +3004,7 @@
               <a:t>0.30</a:t>
             </a:r>
             <a:r>
-              <a:rPr sz="1400" lang="zh-TW" dirty="0">
+              <a:rPr sz="1000" lang="zh-TW" dirty="0">
                 <a:solidFill>
                   <a:srgbClr val="000000"/>
                 </a:solidFill>
@@ -3022,11 +3022,11 @@
                 <a:spcPts val="0"/>
               </a:spcBef>
               <a:spcAft>
-                <a:spcPts val="233"/>
+                <a:spcPts val="167"/>
               </a:spcAft>
             </a:pPr>
             <a:r>
-              <a:rPr sz="1400" lang="zh-TW" dirty="0">
+              <a:rPr sz="1000" lang="zh-TW" dirty="0">
                 <a:solidFill>
                   <a:srgbClr val="000000"/>
                 </a:solidFill>
@@ -3044,11 +3044,33 @@
                 <a:spcPts val="0"/>
               </a:spcBef>
               <a:spcAft>
-                <a:spcPts val="233"/>
+                <a:spcPts val="167"/>
               </a:spcAft>
             </a:pPr>
             <a:r>
-              <a:rPr sz="1400" lang="zh-TW" dirty="0">
+              <a:rPr sz="1000" lang="zh-TW" dirty="0">
+                <a:solidFill>
+                  <a:srgbClr val="000000"/>
+                </a:solidFill>
+                <a:latin typeface="Arial Unicode MS"/>
+                <a:ea typeface="Arial Unicode MS"/>
+                <a:cs typeface="Arial Unicode MS"/>
+              </a:rPr>
+              <a:t>為什麼不直接量「框偏了幾個像素」就好？因為同樣偏 10 個像素，對大東西和小東西的意思差很多。一台近處的車，框是 200 乘 200 個像素，往右偏 10 個像素，IoU 還有 0.90，幾乎一樣；一個遠處的行人，框只有 20 乘 40 個像素，同樣往右偏 10 個像素，IoU 只剩 0.33，已經偏掉一半。IoU 是用比例來算的，所以不管物體大或小，都可以用同一個標準來判斷。
+</a:t>
+            </a:r>
+          </a:p>
+          <a:p>
+            <a:pPr algn="l">
+              <a:spcBef>
+                <a:spcPts val="0"/>
+              </a:spcBef>
+              <a:spcAft>
+                <a:spcPts val="167"/>
+              </a:spcAft>
+            </a:pPr>
+            <a:r>
+              <a:rPr sz="1000" lang="zh-TW" dirty="0">
                 <a:solidFill>
                   <a:srgbClr val="000000"/>
                 </a:solidFill>
@@ -3059,7 +3081,7 @@
               <a:t>今天的網頁，</a:t>
             </a:r>
             <a:r>
-              <a:rPr sz="1400" b="1" lang="zh-TW" dirty="0">
+              <a:rPr sz="1000" b="1" lang="zh-TW" dirty="0">
                 <a:solidFill>
                   <a:srgbClr val="000000"/>
                 </a:solidFill>
@@ -3070,15 +3092,158 @@
               <a:t>IoU 在 0.3 以上、類別也對，就算框到</a:t>
             </a:r>
             <a:r>
-              <a:rPr sz="1400" lang="zh-TW" dirty="0">
-                <a:solidFill>
-                  <a:srgbClr val="000000"/>
-                </a:solidFill>
-                <a:latin typeface="Arial Unicode MS"/>
-                <a:ea typeface="Arial Unicode MS"/>
-                <a:cs typeface="Arial Unicode MS"/>
-              </a:rPr>
-              <a:t>。門檻放這麼低，是因為官方的答案是從立體框算出來的，跟你在照片上看到的邊緣本來就會差一些。正式的比賽常用 0.5 或 0.7，要求嚴很多。第十週評估模型的時候還會再用到 IoU。</a:t>
+              <a:rPr sz="1000" lang="zh-TW" dirty="0">
+                <a:solidFill>
+                  <a:srgbClr val="000000"/>
+                </a:solidFill>
+                <a:latin typeface="Arial Unicode MS"/>
+                <a:ea typeface="Arial Unicode MS"/>
+                <a:cs typeface="Arial Unicode MS"/>
+              </a:rPr>
+              <a:t>。門檻放這麼低，是因為官方的答案是從立體框算出來的，跟你在照片上看到的邊緣本來就會差一些。正式的比賽常用 0.5 或 0.7，要求嚴很多。第十週評估模型的時候還會再用到 IoU。
+</a:t>
+            </a:r>
+          </a:p>
+          <a:p>
+            <a:pPr algn="l">
+              <a:spcBef>
+                <a:spcPts val="0"/>
+              </a:spcBef>
+              <a:spcAft>
+                <a:spcPts val="167"/>
+              </a:spcAft>
+            </a:pPr>
+            <a:r>
+              <a:rPr sz="1000" b="1" lang="zh-TW" dirty="0">
+                <a:solidFill>
+                  <a:srgbClr val="000000"/>
+                </a:solidFill>
+                <a:latin typeface="Arial Unicode MS"/>
+                <a:ea typeface="Arial Unicode MS"/>
+                <a:cs typeface="Arial Unicode MS"/>
+              </a:rPr>
+              <a:t>IoU 用在哪裡？</a:t>
+            </a:r>
+            <a:r>
+              <a:rPr sz="1000" lang="zh-TW" dirty="0">
+                <a:solidFill>
+                  <a:srgbClr val="000000"/>
+                </a:solidFill>
+                <a:latin typeface="Arial Unicode MS"/>
+                <a:ea typeface="Arial Unicode MS"/>
+                <a:cs typeface="Arial Unicode MS"/>
+              </a:rPr>
+              <a:t>最主要有四個地方。第一，</a:t>
+            </a:r>
+            <a:r>
+              <a:rPr sz="1000" b="1" lang="zh-TW" dirty="0">
+                <a:solidFill>
+                  <a:srgbClr val="000000"/>
+                </a:solidFill>
+                <a:latin typeface="Arial Unicode MS"/>
+                <a:ea typeface="Arial Unicode MS"/>
+                <a:cs typeface="Arial Unicode MS"/>
+              </a:rPr>
+              <a:t>對答案、算成績</a:t>
+            </a:r>
+            <a:r>
+              <a:rPr sz="1000" lang="zh-TW" dirty="0">
+                <a:solidFill>
+                  <a:srgbClr val="000000"/>
+                </a:solidFill>
+                <a:latin typeface="Arial Unicode MS"/>
+                <a:ea typeface="Arial Unicode MS"/>
+                <a:cs typeface="Arial Unicode MS"/>
+              </a:rPr>
+              <a:t>。今天的練習台是這樣，第一節第 18、19 張的「抓到幾成」也是這樣算的：模型的框和官方答案的框，IoU 在 0.3 以上、類別也對，才算抓到。IoU 門檻定在哪裡，會影響成績：同一個模型、同樣的分數門檻 0.3，行人用 IoU 0.3 判斷，抓到 53%；改成 IoU 0.5，就只剩 41%。所以看別人公布的成績，一定要問 IoU 門檻是多少。
+</a:t>
+            </a:r>
+          </a:p>
+          <a:p>
+            <a:pPr algn="l">
+              <a:spcBef>
+                <a:spcPts val="0"/>
+              </a:spcBef>
+              <a:spcAft>
+                <a:spcPts val="167"/>
+              </a:spcAft>
+            </a:pPr>
+            <a:r>
+              <a:rPr sz="1000" lang="zh-TW" dirty="0">
+                <a:solidFill>
+                  <a:srgbClr val="000000"/>
+                </a:solidFill>
+                <a:latin typeface="Arial Unicode MS"/>
+                <a:ea typeface="Arial Unicode MS"/>
+                <a:cs typeface="Arial Unicode MS"/>
+              </a:rPr>
+              <a:t>第二，</a:t>
+            </a:r>
+            <a:r>
+              <a:rPr sz="1000" b="1" lang="zh-TW" dirty="0">
+                <a:solidFill>
+                  <a:srgbClr val="000000"/>
+                </a:solidFill>
+                <a:latin typeface="Arial Unicode MS"/>
+                <a:ea typeface="Arial Unicode MS"/>
+                <a:cs typeface="Arial Unicode MS"/>
+              </a:rPr>
+              <a:t>去掉重複的框</a:t>
+            </a:r>
+            <a:r>
+              <a:rPr sz="1000" lang="zh-TW" dirty="0">
+                <a:solidFill>
+                  <a:srgbClr val="000000"/>
+                </a:solidFill>
+                <a:latin typeface="Arial Unicode MS"/>
+                <a:ea typeface="Arial Unicode MS"/>
+                <a:cs typeface="Arial Unicode MS"/>
+              </a:rPr>
+              <a:t>。模型常常對同一個人，猜出好幾個差不多的框。做法是留下分數最高的那一個，其他跟它 IoU 太大的框，就當成重複的刪掉。我們跑的 YOLOX，這個門檻設在 0.45。第三，</a:t>
+            </a:r>
+            <a:r>
+              <a:rPr sz="1000" b="1" lang="zh-TW" dirty="0">
+                <a:solidFill>
+                  <a:srgbClr val="000000"/>
+                </a:solidFill>
+                <a:latin typeface="Arial Unicode MS"/>
+                <a:ea typeface="Arial Unicode MS"/>
+                <a:cs typeface="Arial Unicode MS"/>
+              </a:rPr>
+              <a:t>訓練的時候對答案</a:t>
+            </a:r>
+            <a:r>
+              <a:rPr sz="1000" lang="zh-TW" dirty="0">
+                <a:solidFill>
+                  <a:srgbClr val="000000"/>
+                </a:solidFill>
+                <a:latin typeface="Arial Unicode MS"/>
+                <a:ea typeface="Arial Unicode MS"/>
+                <a:cs typeface="Arial Unicode MS"/>
+              </a:rPr>
+              <a:t>。第一節講「猜、對答案、改一點點」，對答案之前要先知道，模型猜的這個框是在猜哪一個人；常用的做法，就是看它跟哪一個標準答案的框 IoU 比較大。YOLOX 也用 IoU 來量框偏了多少，當成損失函數的一部分。第四，</a:t>
+            </a:r>
+            <a:r>
+              <a:rPr sz="1000" b="1" lang="zh-TW" dirty="0">
+                <a:solidFill>
+                  <a:srgbClr val="000000"/>
+                </a:solidFill>
+                <a:latin typeface="Arial Unicode MS"/>
+                <a:ea typeface="Arial Unicode MS"/>
+                <a:cs typeface="Arial Unicode MS"/>
+              </a:rPr>
+              <a:t>檢查標註的品質</a:t>
+            </a:r>
+            <a:r>
+              <a:rPr sz="1000" lang="zh-TW" dirty="0">
+                <a:solidFill>
+                  <a:srgbClr val="000000"/>
+                </a:solidFill>
+                <a:latin typeface="Arial Unicode MS"/>
+                <a:ea typeface="Arial Unicode MS"/>
+                <a:cs typeface="Arial Unicode MS"/>
+              </a:rPr>
+              <a:t>。兩個標註員標同一個物體，算一下兩個框的 IoU，就知道兩個人標得一不一致，這就是第 2 張講的抽查。</a:t>
             </a:r>
           </a:p>
         </p:txBody>

--- a/第八週(10-29)/第八週_第2節_簡報.pptx
+++ b/第八週(10-29)/第八週_第2節_簡報.pptx
@@ -2010,11 +2010,11 @@
                 <a:spcPts val="0"/>
               </a:spcBef>
               <a:spcAft>
-                <a:spcPts val="208"/>
+                <a:spcPts val="150"/>
               </a:spcAft>
             </a:pPr>
             <a:r>
-              <a:rPr sz="1250" b="1" lang="zh-TW" dirty="0">
+              <a:rPr sz="900" b="1" lang="zh-TW" dirty="0">
                 <a:solidFill>
                   <a:srgbClr val="000000"/>
                 </a:solidFill>
@@ -2025,7 +2025,7 @@
               <a:t>這一張的目的：</a:t>
             </a:r>
             <a:r>
-              <a:rPr sz="1250" lang="zh-TW" dirty="0">
+              <a:rPr sz="900" lang="zh-TW" dirty="0">
                 <a:solidFill>
                   <a:srgbClr val="000000"/>
                 </a:solidFill>
@@ -2043,11 +2043,11 @@
                 <a:spcPts val="0"/>
               </a:spcBef>
               <a:spcAft>
-                <a:spcPts val="208"/>
+                <a:spcPts val="150"/>
               </a:spcAft>
             </a:pPr>
             <a:r>
-              <a:rPr sz="1250" lang="zh-TW" dirty="0">
+              <a:rPr sz="900" lang="zh-TW" dirty="0">
                 <a:solidFill>
                   <a:srgbClr val="000000"/>
                 </a:solidFill>
@@ -2065,11 +2065,11 @@
                 <a:spcPts val="0"/>
               </a:spcBef>
               <a:spcAft>
-                <a:spcPts val="208"/>
+                <a:spcPts val="150"/>
               </a:spcAft>
             </a:pPr>
             <a:r>
-              <a:rPr sz="1250" b="1" lang="zh-TW" dirty="0">
+              <a:rPr sz="900" b="1" lang="zh-TW" dirty="0">
                 <a:solidFill>
                   <a:srgbClr val="000000"/>
                 </a:solidFill>
@@ -2080,7 +2080,7 @@
               <a:t>第一條：只要有一個光達或雷達的點打在物體上，就要標。</a:t>
             </a:r>
             <a:r>
-              <a:rPr sz="1250" lang="zh-TW" dirty="0">
+              <a:rPr sz="900" lang="zh-TW" dirty="0">
                 <a:solidFill>
                   <a:srgbClr val="000000"/>
                 </a:solidFill>
@@ -2098,11 +2098,11 @@
                 <a:spcPts val="0"/>
               </a:spcBef>
               <a:spcAft>
-                <a:spcPts val="208"/>
+                <a:spcPts val="150"/>
               </a:spcAft>
             </a:pPr>
             <a:r>
-              <a:rPr sz="1250" b="1" lang="zh-TW" dirty="0">
+              <a:rPr sz="900" b="1" lang="zh-TW" dirty="0">
                 <a:solidFill>
                   <a:srgbClr val="000000"/>
                 </a:solidFill>
@@ -2113,7 +2113,7 @@
               <a:t>第二條：框要很貼。</a:t>
             </a:r>
             <a:r>
-              <a:rPr sz="1250" lang="zh-TW" dirty="0">
+              <a:rPr sz="900" lang="zh-TW" dirty="0">
                 <a:solidFill>
                   <a:srgbClr val="000000"/>
                 </a:solidFill>
@@ -2131,11 +2131,11 @@
                 <a:spcPts val="0"/>
               </a:spcBef>
               <a:spcAft>
-                <a:spcPts val="208"/>
+                <a:spcPts val="150"/>
               </a:spcAft>
             </a:pPr>
             <a:r>
-              <a:rPr sz="1250" b="1" lang="zh-TW" dirty="0">
+              <a:rPr sz="900" b="1" lang="zh-TW" dirty="0">
                 <a:solidFill>
                   <a:srgbClr val="000000"/>
                 </a:solidFill>
@@ -2146,7 +2146,7 @@
               <a:t>第三條：手腳要包進去。</a:t>
             </a:r>
             <a:r>
-              <a:rPr sz="1250" lang="zh-TW" dirty="0">
+              <a:rPr sz="900" lang="zh-TW" dirty="0">
                 <a:solidFill>
                   <a:srgbClr val="000000"/>
                 </a:solidFill>
@@ -2164,11 +2164,11 @@
                 <a:spcPts val="0"/>
               </a:spcBef>
               <a:spcAft>
-                <a:spcPts val="208"/>
+                <a:spcPts val="150"/>
               </a:spcAft>
             </a:pPr>
             <a:r>
-              <a:rPr sz="1250" b="1" lang="zh-TW" dirty="0">
+              <a:rPr sz="900" b="1" lang="zh-TW" dirty="0">
                 <a:solidFill>
                   <a:srgbClr val="000000"/>
                 </a:solidFill>
@@ -2179,7 +2179,7 @@
               <a:t>第四條、第五條，騎士。</a:t>
             </a:r>
             <a:r>
-              <a:rPr sz="1250" lang="zh-TW" dirty="0">
+              <a:rPr sz="900" lang="zh-TW" dirty="0">
                 <a:solidFill>
                   <a:srgbClr val="000000"/>
                 </a:solidFill>
@@ -2190,7 +2190,7 @@
               <a:t>機車、腳踏車有人騎，</a:t>
             </a:r>
             <a:r>
-              <a:rPr sz="1250" b="1" lang="zh-TW" dirty="0">
+              <a:rPr sz="900" b="1" lang="zh-TW" dirty="0">
                 <a:solidFill>
                   <a:srgbClr val="000000"/>
                 </a:solidFill>
@@ -2201,7 +2201,7 @@
               <a:t>騎士跟車框在同一個框裡</a:t>
             </a:r>
             <a:r>
-              <a:rPr sz="1250" lang="zh-TW" dirty="0">
+              <a:rPr sz="900" lang="zh-TW" dirty="0">
                 <a:solidFill>
                   <a:srgbClr val="000000"/>
                 </a:solidFill>
@@ -2212,7 +2212,7 @@
               <a:t>；可是旁邊站著、沒有騎的人，</a:t>
             </a:r>
             <a:r>
-              <a:rPr sz="1250" b="1" lang="zh-TW" dirty="0">
+              <a:rPr sz="900" b="1" lang="zh-TW" dirty="0">
                 <a:solidFill>
                   <a:srgbClr val="000000"/>
                 </a:solidFill>
@@ -2223,7 +2223,7 @@
               <a:t>不要包進去</a:t>
             </a:r>
             <a:r>
-              <a:rPr sz="1250" lang="zh-TW" dirty="0">
+              <a:rPr sz="900" lang="zh-TW" dirty="0">
                 <a:solidFill>
                   <a:srgbClr val="000000"/>
                 </a:solidFill>
@@ -2241,11 +2241,11 @@
                 <a:spcPts val="0"/>
               </a:spcBef>
               <a:spcAft>
-                <a:spcPts val="208"/>
+                <a:spcPts val="150"/>
               </a:spcAft>
             </a:pPr>
             <a:r>
-              <a:rPr sz="1250" b="1" lang="zh-TW" dirty="0">
+              <a:rPr sz="900" b="1" lang="zh-TW" dirty="0">
                 <a:solidFill>
                   <a:srgbClr val="000000"/>
                 </a:solidFill>
@@ -2256,15 +2256,15 @@
               <a:t>第六條：可見度分四級。</a:t>
             </a:r>
             <a:r>
-              <a:rPr sz="1250" lang="zh-TW" dirty="0">
-                <a:solidFill>
-                  <a:srgbClr val="000000"/>
-                </a:solidFill>
-                <a:latin typeface="Arial Unicode MS"/>
-                <a:ea typeface="Arial Unicode MS"/>
-                <a:cs typeface="Arial Unicode MS"/>
-              </a:rPr>
-              <a:t>這個物體被擋住多少，看得到零到四成、四到六成、六到八成、八成以上。上一節的統計，我只算看得到六成以上的，就是用這個欄位。
+              <a:rPr sz="900" lang="zh-TW" dirty="0">
+                <a:solidFill>
+                  <a:srgbClr val="000000"/>
+                </a:solidFill>
+                <a:latin typeface="Arial Unicode MS"/>
+                <a:ea typeface="Arial Unicode MS"/>
+                <a:cs typeface="Arial Unicode MS"/>
+              </a:rPr>
+              <a:t>意思是這個物體有幾成看得到：零到四成、四到六成、六到八成、八成以上，四級選一級。
 </a:t>
             </a:r>
           </a:p>
@@ -2274,19 +2274,41 @@
                 <a:spcPts val="0"/>
               </a:spcBef>
               <a:spcAft>
-                <a:spcPts val="208"/>
+                <a:spcPts val="150"/>
               </a:spcAft>
             </a:pPr>
             <a:r>
-              <a:rPr sz="1250" lang="zh-TW" dirty="0">
-                <a:solidFill>
-                  <a:srgbClr val="000000"/>
-                </a:solidFill>
-                <a:latin typeface="Arial Unicode MS"/>
-                <a:ea typeface="Arial Unicode MS"/>
-                <a:cs typeface="Arial Unicode MS"/>
-              </a:rPr>
-              <a:t>注意，nuScenes 標的是立體框，今天我們在照片上標平面框，比較簡單，但規則的精神一樣。網頁右邊也寫了一份今天的規則。
+              <a:rPr sz="900" lang="zh-TW" dirty="0">
+                <a:solidFill>
+                  <a:srgbClr val="000000"/>
+                </a:solidFill>
+                <a:latin typeface="Arial Unicode MS"/>
+                <a:ea typeface="Arial Unicode MS"/>
+                <a:cs typeface="Arial Unicode MS"/>
+              </a:rPr>
+              <a:t>怎麼標？</a:t>
+            </a:r>
+            <a:r>
+              <a:rPr sz="900" b="1" lang="zh-TW" dirty="0">
+                <a:solidFill>
+                  <a:srgbClr val="000000"/>
+                </a:solidFill>
+                <a:latin typeface="Arial Unicode MS"/>
+                <a:ea typeface="Arial Unicode MS"/>
+                <a:cs typeface="Arial Unicode MS"/>
+              </a:rPr>
+              <a:t>標註員是用眼睛估的，不是一個像素一個像素去數。</a:t>
+            </a:r>
+            <a:r>
+              <a:rPr sz="900" lang="zh-TW" dirty="0">
+                <a:solidFill>
+                  <a:srgbClr val="000000"/>
+                </a:solidFill>
+                <a:latin typeface="Arial Unicode MS"/>
+                <a:ea typeface="Arial Unicode MS"/>
+                <a:cs typeface="Arial Unicode MS"/>
+              </a:rPr>
+              <a:t>步驟是這樣：先把這個物體的立體框畫好，被擋住的部分也要框進去，所以這個框投到照片上，就是這個物體「整個應該有多大」。然後看這個範圍裡，有多少被前面的車、柱子或別的人擋住，估一個比例，選一級。
 </a:t>
             </a:r>
           </a:p>
@@ -2296,11 +2318,143 @@
                 <a:spcPts val="0"/>
               </a:spcBef>
               <a:spcAft>
-                <a:spcPts val="208"/>
+                <a:spcPts val="150"/>
               </a:spcAft>
             </a:pPr>
             <a:r>
-              <a:rPr sz="1250" b="1" lang="zh-TW" dirty="0">
+              <a:rPr sz="900" lang="zh-TW" dirty="0">
+                <a:solidFill>
+                  <a:srgbClr val="000000"/>
+                </a:solidFill>
+                <a:latin typeface="Arial Unicode MS"/>
+                <a:ea typeface="Arial Unicode MS"/>
+                <a:cs typeface="Arial Unicode MS"/>
+              </a:rPr>
+              <a:t>有兩個細節。第一，nuScenes 的車上有六台相機，規則說要把六張照片接起來，當成一整張全景來看。所以一台車剛好跨在兩台相機的交界，一半在這張照片、一半在隔壁那張，這不算被擋住。第二，級距分得很粗，第一級就包了零到四成。因為這是用眼睛估的，分得粗一點，不同的標註員才比較會選到同一級。
+</a:t>
+            </a:r>
+          </a:p>
+          <a:p>
+            <a:pPr algn="l">
+              <a:spcBef>
+                <a:spcPts val="0"/>
+              </a:spcBef>
+              <a:spcAft>
+                <a:spcPts val="150"/>
+              </a:spcAft>
+            </a:pPr>
+            <a:r>
+              <a:rPr sz="900" lang="zh-TW" dirty="0">
+                <a:solidFill>
+                  <a:srgbClr val="000000"/>
+                </a:solidFill>
+                <a:latin typeface="Arial Unicode MS"/>
+                <a:ea typeface="Arial Unicode MS"/>
+                <a:cs typeface="Arial Unicode MS"/>
+              </a:rPr>
+              <a:t>就像拍團體照：後排的人被前排擋住大半個身體，就是零到四成；只被擋住一邊的肩膀，就是六到八成以上。
+</a:t>
+            </a:r>
+          </a:p>
+          <a:p>
+            <a:pPr algn="l">
+              <a:spcBef>
+                <a:spcPts val="0"/>
+              </a:spcBef>
+              <a:spcAft>
+                <a:spcPts val="150"/>
+              </a:spcAft>
+            </a:pPr>
+            <a:r>
+              <a:rPr sz="900" lang="zh-TW" dirty="0">
+                <a:solidFill>
+                  <a:srgbClr val="000000"/>
+                </a:solidFill>
+                <a:latin typeface="Arial Unicode MS"/>
+                <a:ea typeface="Arial Unicode MS"/>
+                <a:cs typeface="Arial Unicode MS"/>
+              </a:rPr>
+              <a:t>等一下練習台的任務一就有一個真的例子：斑馬線上穿紅褲子的那個人後面，還有一個人，幾乎整個被前面的人擋住，只露出一小塊。官方把他標成零到四成，可是他的框跟一個完整的人一樣大，因為立體框要把擋住的部分也框進去。
+</a:t>
+            </a:r>
+          </a:p>
+          <a:p>
+            <a:pPr algn="l">
+              <a:spcBef>
+                <a:spcPts val="0"/>
+              </a:spcBef>
+              <a:spcAft>
+                <a:spcPts val="150"/>
+              </a:spcAft>
+            </a:pPr>
+            <a:r>
+              <a:rPr sz="900" lang="zh-TW" dirty="0">
+                <a:solidFill>
+                  <a:srgbClr val="000000"/>
+                </a:solidFill>
+                <a:latin typeface="Arial Unicode MS"/>
+                <a:ea typeface="Arial Unicode MS"/>
+                <a:cs typeface="Arial Unicode MS"/>
+              </a:rPr>
+              <a:t>這個欄位有什麼用？上一節的距離圖，我只算看得到六成以上的物體，就是用這一欄篩的。今天的練習台，看得到不到四成、或在照片上太小的物體，列成「可標可不標」，也是用這一欄。</a:t>
+            </a:r>
+            <a:r>
+              <a:rPr sz="900" b="1" lang="zh-TW" dirty="0">
+                <a:solidFill>
+                  <a:srgbClr val="000000"/>
+                </a:solidFill>
+                <a:latin typeface="Arial Unicode MS"/>
+                <a:ea typeface="Arial Unicode MS"/>
+                <a:cs typeface="Arial Unicode MS"/>
+              </a:rPr>
+              <a:t>今天大家不用自己標可見度</a:t>
+            </a:r>
+            <a:r>
+              <a:rPr sz="900" lang="zh-TW" dirty="0">
+                <a:solidFill>
+                  <a:srgbClr val="000000"/>
+                </a:solidFill>
+                <a:latin typeface="Arial Unicode MS"/>
+                <a:ea typeface="Arial Unicode MS"/>
+                <a:cs typeface="Arial Unicode MS"/>
+              </a:rPr>
+              <a:t>，對答案的時候，答案表會顯示官方標的可見度。另外提醒：練習台標的是平面框，規則第四條是「被擋住一部分的，框看得到的部分」，這一點和 nuScenes 的立體框不一樣。
+</a:t>
+            </a:r>
+          </a:p>
+          <a:p>
+            <a:pPr algn="l">
+              <a:spcBef>
+                <a:spcPts val="0"/>
+              </a:spcBef>
+              <a:spcAft>
+                <a:spcPts val="150"/>
+              </a:spcAft>
+            </a:pPr>
+            <a:r>
+              <a:rPr sz="900" lang="zh-TW" dirty="0">
+                <a:solidFill>
+                  <a:srgbClr val="000000"/>
+                </a:solidFill>
+                <a:latin typeface="Arial Unicode MS"/>
+                <a:ea typeface="Arial Unicode MS"/>
+                <a:cs typeface="Arial Unicode MS"/>
+              </a:rPr>
+              <a:t>注意，nuScenes 標的是立體框，今天我們在照片上標平面框，比較簡單，但規則的精神一樣。網頁右邊也寫了一份今天的規則。
+</a:t>
+            </a:r>
+          </a:p>
+          <a:p>
+            <a:pPr algn="l">
+              <a:spcBef>
+                <a:spcPts val="0"/>
+              </a:spcBef>
+              <a:spcAft>
+                <a:spcPts val="150"/>
+              </a:spcAft>
+            </a:pPr>
+            <a:r>
+              <a:rPr sz="900" b="1" lang="zh-TW" dirty="0">
                 <a:solidFill>
                   <a:srgbClr val="000000"/>
                 </a:solidFill>
@@ -2311,7 +2465,7 @@
               <a:t>影片（CVAT 官方教學，英文，可開自動翻譯字幕）：從 0:16 播到 2:47。</a:t>
             </a:r>
             <a:r>
-              <a:rPr sz="1250" lang="zh-TW" dirty="0">
+              <a:rPr sz="900" lang="zh-TW" dirty="0">
                 <a:solidFill>
                   <a:srgbClr val="000000"/>
                 </a:solidFill>
